--- a/public/assets/samples/manga-translation-after.pptx
+++ b/public/assets/samples/manga-translation-after.pptx
@@ -3084,7 +3084,7 @@
     <p:bg>
       <p:bgPr>
         <a:solidFill>
-          <a:srgbClr val="F4F7FA"/>
+          <a:srgbClr val="FFFFFF"/>
         </a:solidFill>
         <a:effectLst/>
       </p:bgPr>
@@ -3096,9 +3096,2789 @@
         <p:nvPr/>
       </p:nvGrpSpPr>
       <p:grpSpPr/>
+      <p:sp>
+        <p:nvSpPr>
+          <p:cNvPr id="2" name="TextBox 1"/>
+          <p:cNvSpPr txBox="1"/>
+          <p:nvPr/>
+        </p:nvSpPr>
+        <p:spPr>
+          <a:xfrm>
+            <a:off x="243840" y="365760"/>
+            <a:ext cx="4876800" cy="731520"/>
+          </a:xfrm>
+          <a:prstGeom prst="rect">
+            <a:avLst/>
+          </a:prstGeom>
+          <a:noFill/>
+        </p:spPr>
+        <p:txBody>
+          <a:bodyPr wrap="none" lIns="0" rIns="0" tIns="0" bIns="0">
+            <a:spAutoFit/>
+          </a:bodyPr>
+          <a:lstStyle/>
+          <a:p>
+            <a:r>
+              <a:rPr b="1" sz="2800">
+                <a:solidFill>
+                  <a:srgbClr val="003366"/>
+                </a:solidFill>
+                <a:latin typeface="Yu Gothic"/>
+              </a:rPr>
+              <a:t>マンガ翻訳サービスのご提案</a:t>
+            </a:r>
+          </a:p>
+        </p:txBody>
+      </p:sp>
+      <p:sp>
+        <p:nvSpPr>
+          <p:cNvPr id="3" name="TextBox 2"/>
+          <p:cNvSpPr txBox="1"/>
+          <p:nvPr/>
+        </p:nvSpPr>
+        <p:spPr>
+          <a:xfrm>
+            <a:off x="243840" y="1097280"/>
+            <a:ext cx="4876800" cy="487680"/>
+          </a:xfrm>
+          <a:prstGeom prst="rect">
+            <a:avLst/>
+          </a:prstGeom>
+          <a:noFill/>
+        </p:spPr>
+        <p:txBody>
+          <a:bodyPr wrap="none" lIns="0" rIns="0" tIns="0" bIns="0">
+            <a:spAutoFit/>
+          </a:bodyPr>
+          <a:lstStyle/>
+          <a:p>
+            <a:r>
+              <a:rPr b="1" sz="1800">
+                <a:solidFill>
+                  <a:srgbClr val="004098"/>
+                </a:solidFill>
+                <a:latin typeface="Yu Gothic"/>
+              </a:rPr>
+              <a:t>高品質なマンガ翻訳で、作品の価値を世界へ</a:t>
+            </a:r>
+          </a:p>
+        </p:txBody>
+      </p:sp>
+      <p:sp>
+        <p:nvSpPr>
+          <p:cNvPr id="4" name="TextBox 3"/>
+          <p:cNvSpPr txBox="1"/>
+          <p:nvPr/>
+        </p:nvSpPr>
+        <p:spPr>
+          <a:xfrm>
+            <a:off x="243840" y="1584960"/>
+            <a:ext cx="4470400" cy="731520"/>
+          </a:xfrm>
+          <a:prstGeom prst="rect">
+            <a:avLst/>
+          </a:prstGeom>
+          <a:noFill/>
+        </p:spPr>
+        <p:txBody>
+          <a:bodyPr wrap="none" lIns="0" rIns="0" tIns="0" bIns="0">
+            <a:spAutoFit/>
+          </a:bodyPr>
+          <a:lstStyle/>
+          <a:p>
+            <a:r>
+              <a:rPr b="0" sz="1100">
+                <a:solidFill>
+                  <a:srgbClr val="333333"/>
+                </a:solidFill>
+                <a:latin typeface="Yu Gothic"/>
+              </a:rPr>
+              <a:t>当サービスは、マンガの魅力をそのままに、自然で読みやすい翻訳を提供します。ネイティブチェックと専門知識を持つ翻訳者・編集者が、作品の世界観やキャラクターの個性を大切にしながら、最適なローカライズを実現します。</a:t>
+            </a:r>
+          </a:p>
+        </p:txBody>
+      </p:sp>
+      <p:sp>
+        <p:nvSpPr>
+          <p:cNvPr id="5" name="Rounded Rectangle 4"/>
+          <p:cNvSpPr/>
+          <p:nvPr/>
+        </p:nvSpPr>
+        <p:spPr>
+          <a:xfrm>
+            <a:off x="243840" y="2560320"/>
+            <a:ext cx="3169920" cy="365760"/>
+          </a:xfrm>
+          <a:prstGeom prst="roundRect">
+            <a:avLst/>
+          </a:prstGeom>
+          <a:solidFill>
+            <a:srgbClr val="004098"/>
+          </a:solidFill>
+          <a:ln w="15000">
+            <a:solidFill>
+              <a:srgbClr val="004098"/>
+            </a:solidFill>
+          </a:ln>
+        </p:spPr>
+        <p:style>
+          <a:lnRef idx="1">
+            <a:schemeClr val="accent1"/>
+          </a:lnRef>
+          <a:fillRef idx="3">
+            <a:schemeClr val="accent1"/>
+          </a:fillRef>
+          <a:effectRef idx="2">
+            <a:schemeClr val="accent1"/>
+          </a:effectRef>
+          <a:fontRef idx="minor">
+            <a:schemeClr val="lt1"/>
+          </a:fontRef>
+        </p:style>
+        <p:txBody>
+          <a:bodyPr rtlCol="0" anchor="ctr" lIns="70000" rIns="70000" tIns="50000" bIns="50000" wrap="square"/>
+          <a:lstStyle/>
+          <a:p>
+            <a:pPr algn="ctr"/>
+            <a:r>
+              <a:rPr b="1" sz="1200">
+                <a:solidFill>
+                  <a:srgbClr val="FFFFFF"/>
+                </a:solidFill>
+                <a:latin typeface="Yu Gothic"/>
+              </a:rPr>
+              <a:t>1 サービスの特徴</a:t>
+            </a:r>
+          </a:p>
+        </p:txBody>
+      </p:sp>
+      <p:sp>
+        <p:nvSpPr>
+          <p:cNvPr id="6" name="Oval 5"/>
+          <p:cNvSpPr/>
+          <p:nvPr/>
+        </p:nvSpPr>
+        <p:spPr>
+          <a:xfrm>
+            <a:off x="406400" y="3169920"/>
+            <a:ext cx="406400" cy="609600"/>
+          </a:xfrm>
+          <a:prstGeom prst="ellipse">
+            <a:avLst/>
+          </a:prstGeom>
+          <a:solidFill>
+            <a:srgbClr val="E6F2FF"/>
+          </a:solidFill>
+          <a:ln w="15000">
+            <a:solidFill>
+              <a:srgbClr val="004098"/>
+            </a:solidFill>
+          </a:ln>
+        </p:spPr>
+        <p:style>
+          <a:lnRef idx="1">
+            <a:schemeClr val="accent1"/>
+          </a:lnRef>
+          <a:fillRef idx="3">
+            <a:schemeClr val="accent1"/>
+          </a:fillRef>
+          <a:effectRef idx="2">
+            <a:schemeClr val="accent1"/>
+          </a:effectRef>
+          <a:fontRef idx="minor">
+            <a:schemeClr val="lt1"/>
+          </a:fontRef>
+        </p:style>
+        <p:txBody>
+          <a:bodyPr rtlCol="0" anchor="ctr"/>
+          <a:lstStyle/>
+          <a:p>
+            <a:pPr algn="ctr"/>
+          </a:p>
+        </p:txBody>
+      </p:sp>
+      <p:sp>
+        <p:nvSpPr>
+          <p:cNvPr id="7" name="TextBox 6"/>
+          <p:cNvSpPr txBox="1"/>
+          <p:nvPr/>
+        </p:nvSpPr>
+        <p:spPr>
+          <a:xfrm>
+            <a:off x="975360" y="3048000"/>
+            <a:ext cx="2438400" cy="243840"/>
+          </a:xfrm>
+          <a:prstGeom prst="rect">
+            <a:avLst/>
+          </a:prstGeom>
+          <a:noFill/>
+        </p:spPr>
+        <p:txBody>
+          <a:bodyPr wrap="none" lIns="0" rIns="0" tIns="0" bIns="0">
+            <a:spAutoFit/>
+          </a:bodyPr>
+          <a:lstStyle/>
+          <a:p>
+            <a:r>
+              <a:rPr b="1" sz="1200">
+                <a:solidFill>
+                  <a:srgbClr val="003366"/>
+                </a:solidFill>
+                <a:latin typeface="Yu Gothic"/>
+              </a:rPr>
+              <a:t>ネイティブによる自然な翻訳</a:t>
+            </a:r>
+          </a:p>
+        </p:txBody>
+      </p:sp>
+      <p:sp>
+        <p:nvSpPr>
+          <p:cNvPr id="8" name="TextBox 7"/>
+          <p:cNvSpPr txBox="1"/>
+          <p:nvPr/>
+        </p:nvSpPr>
+        <p:spPr>
+          <a:xfrm>
+            <a:off x="975360" y="3291840"/>
+            <a:ext cx="2438400" cy="365760"/>
+          </a:xfrm>
+          <a:prstGeom prst="rect">
+            <a:avLst/>
+          </a:prstGeom>
+          <a:noFill/>
+        </p:spPr>
+        <p:txBody>
+          <a:bodyPr wrap="none" lIns="0" rIns="0" tIns="0" bIns="0">
+            <a:spAutoFit/>
+          </a:bodyPr>
+          <a:lstStyle/>
+          <a:p>
+            <a:r>
+              <a:rPr b="0" sz="900">
+                <a:solidFill>
+                  <a:srgbClr val="555555"/>
+                </a:solidFill>
+                <a:latin typeface="Yu Gothic"/>
+              </a:rPr>
+              <a:t>対象言語のネイティブ翻訳者が、自然で読みやすい表現に翻訳します。</a:t>
+            </a:r>
+          </a:p>
+        </p:txBody>
+      </p:sp>
+      <p:sp>
+        <p:nvSpPr>
+          <p:cNvPr id="9" name="Oval 8"/>
+          <p:cNvSpPr/>
+          <p:nvPr/>
+        </p:nvSpPr>
+        <p:spPr>
+          <a:xfrm>
+            <a:off x="406400" y="4023360"/>
+            <a:ext cx="406400" cy="609600"/>
+          </a:xfrm>
+          <a:prstGeom prst="ellipse">
+            <a:avLst/>
+          </a:prstGeom>
+          <a:solidFill>
+            <a:srgbClr val="E6F2FF"/>
+          </a:solidFill>
+          <a:ln w="15000">
+            <a:solidFill>
+              <a:srgbClr val="004098"/>
+            </a:solidFill>
+          </a:ln>
+        </p:spPr>
+        <p:style>
+          <a:lnRef idx="1">
+            <a:schemeClr val="accent1"/>
+          </a:lnRef>
+          <a:fillRef idx="3">
+            <a:schemeClr val="accent1"/>
+          </a:fillRef>
+          <a:effectRef idx="2">
+            <a:schemeClr val="accent1"/>
+          </a:effectRef>
+          <a:fontRef idx="minor">
+            <a:schemeClr val="lt1"/>
+          </a:fontRef>
+        </p:style>
+        <p:txBody>
+          <a:bodyPr rtlCol="0" anchor="ctr"/>
+          <a:lstStyle/>
+          <a:p>
+            <a:pPr algn="ctr"/>
+          </a:p>
+        </p:txBody>
+      </p:sp>
+      <p:sp>
+        <p:nvSpPr>
+          <p:cNvPr id="10" name="TextBox 9"/>
+          <p:cNvSpPr txBox="1"/>
+          <p:nvPr/>
+        </p:nvSpPr>
+        <p:spPr>
+          <a:xfrm>
+            <a:off x="975360" y="3901440"/>
+            <a:ext cx="2438400" cy="243840"/>
+          </a:xfrm>
+          <a:prstGeom prst="rect">
+            <a:avLst/>
+          </a:prstGeom>
+          <a:noFill/>
+        </p:spPr>
+        <p:txBody>
+          <a:bodyPr wrap="none" lIns="0" rIns="0" tIns="0" bIns="0">
+            <a:spAutoFit/>
+          </a:bodyPr>
+          <a:lstStyle/>
+          <a:p>
+            <a:r>
+              <a:rPr b="1" sz="1200">
+                <a:solidFill>
+                  <a:srgbClr val="003366"/>
+                </a:solidFill>
+                <a:latin typeface="Yu Gothic"/>
+              </a:rPr>
+              <a:t>マンガに特化したローカライズ</a:t>
+            </a:r>
+          </a:p>
+        </p:txBody>
+      </p:sp>
+      <p:sp>
+        <p:nvSpPr>
+          <p:cNvPr id="11" name="TextBox 10"/>
+          <p:cNvSpPr txBox="1"/>
+          <p:nvPr/>
+        </p:nvSpPr>
+        <p:spPr>
+          <a:xfrm>
+            <a:off x="975360" y="4145280"/>
+            <a:ext cx="2438400" cy="365760"/>
+          </a:xfrm>
+          <a:prstGeom prst="rect">
+            <a:avLst/>
+          </a:prstGeom>
+          <a:noFill/>
+        </p:spPr>
+        <p:txBody>
+          <a:bodyPr wrap="none" lIns="0" rIns="0" tIns="0" bIns="0">
+            <a:spAutoFit/>
+          </a:bodyPr>
+          <a:lstStyle/>
+          <a:p>
+            <a:r>
+              <a:rPr b="0" sz="900">
+                <a:solidFill>
+                  <a:srgbClr val="555555"/>
+                </a:solidFill>
+                <a:latin typeface="Yu Gothic"/>
+              </a:rPr>
+              <a:t>セリフの口調・キャラクター性・作品世界観を重視した翻訳・編集を行います。</a:t>
+            </a:r>
+          </a:p>
+        </p:txBody>
+      </p:sp>
+      <p:sp>
+        <p:nvSpPr>
+          <p:cNvPr id="12" name="Oval 11"/>
+          <p:cNvSpPr/>
+          <p:nvPr/>
+        </p:nvSpPr>
+        <p:spPr>
+          <a:xfrm>
+            <a:off x="406400" y="4876800"/>
+            <a:ext cx="406400" cy="609600"/>
+          </a:xfrm>
+          <a:prstGeom prst="ellipse">
+            <a:avLst/>
+          </a:prstGeom>
+          <a:solidFill>
+            <a:srgbClr val="E6F2FF"/>
+          </a:solidFill>
+          <a:ln w="15000">
+            <a:solidFill>
+              <a:srgbClr val="004098"/>
+            </a:solidFill>
+          </a:ln>
+        </p:spPr>
+        <p:style>
+          <a:lnRef idx="1">
+            <a:schemeClr val="accent1"/>
+          </a:lnRef>
+          <a:fillRef idx="3">
+            <a:schemeClr val="accent1"/>
+          </a:fillRef>
+          <a:effectRef idx="2">
+            <a:schemeClr val="accent1"/>
+          </a:effectRef>
+          <a:fontRef idx="minor">
+            <a:schemeClr val="lt1"/>
+          </a:fontRef>
+        </p:style>
+        <p:txBody>
+          <a:bodyPr rtlCol="0" anchor="ctr"/>
+          <a:lstStyle/>
+          <a:p>
+            <a:pPr algn="ctr"/>
+          </a:p>
+        </p:txBody>
+      </p:sp>
+      <p:sp>
+        <p:nvSpPr>
+          <p:cNvPr id="13" name="TextBox 12"/>
+          <p:cNvSpPr txBox="1"/>
+          <p:nvPr/>
+        </p:nvSpPr>
+        <p:spPr>
+          <a:xfrm>
+            <a:off x="975360" y="4754880"/>
+            <a:ext cx="2438400" cy="243840"/>
+          </a:xfrm>
+          <a:prstGeom prst="rect">
+            <a:avLst/>
+          </a:prstGeom>
+          <a:noFill/>
+        </p:spPr>
+        <p:txBody>
+          <a:bodyPr wrap="none" lIns="0" rIns="0" tIns="0" bIns="0">
+            <a:spAutoFit/>
+          </a:bodyPr>
+          <a:lstStyle/>
+          <a:p>
+            <a:r>
+              <a:rPr b="1" sz="1200">
+                <a:solidFill>
+                  <a:srgbClr val="003366"/>
+                </a:solidFill>
+                <a:latin typeface="Yu Gothic"/>
+              </a:rPr>
+              <a:t>高品質チェック体制</a:t>
+            </a:r>
+          </a:p>
+        </p:txBody>
+      </p:sp>
+      <p:sp>
+        <p:nvSpPr>
+          <p:cNvPr id="14" name="TextBox 13"/>
+          <p:cNvSpPr txBox="1"/>
+          <p:nvPr/>
+        </p:nvSpPr>
+        <p:spPr>
+          <a:xfrm>
+            <a:off x="975360" y="4998720"/>
+            <a:ext cx="2438400" cy="365760"/>
+          </a:xfrm>
+          <a:prstGeom prst="rect">
+            <a:avLst/>
+          </a:prstGeom>
+          <a:noFill/>
+        </p:spPr>
+        <p:txBody>
+          <a:bodyPr wrap="none" lIns="0" rIns="0" tIns="0" bIns="0">
+            <a:spAutoFit/>
+          </a:bodyPr>
+          <a:lstStyle/>
+          <a:p>
+            <a:r>
+              <a:rPr b="0" sz="900">
+                <a:solidFill>
+                  <a:srgbClr val="555555"/>
+                </a:solidFill>
+                <a:latin typeface="Yu Gothic"/>
+              </a:rPr>
+              <a:t>翻訳後にネイティブチェック・品質チェックを実施し、誤訳や不自然な表現を徹底的に排除します。</a:t>
+            </a:r>
+          </a:p>
+        </p:txBody>
+      </p:sp>
+      <p:sp>
+        <p:nvSpPr>
+          <p:cNvPr id="15" name="Oval 14"/>
+          <p:cNvSpPr/>
+          <p:nvPr/>
+        </p:nvSpPr>
+        <p:spPr>
+          <a:xfrm>
+            <a:off x="406400" y="5730240"/>
+            <a:ext cx="406400" cy="609600"/>
+          </a:xfrm>
+          <a:prstGeom prst="ellipse">
+            <a:avLst/>
+          </a:prstGeom>
+          <a:solidFill>
+            <a:srgbClr val="E6F2FF"/>
+          </a:solidFill>
+          <a:ln w="15000">
+            <a:solidFill>
+              <a:srgbClr val="004098"/>
+            </a:solidFill>
+          </a:ln>
+        </p:spPr>
+        <p:style>
+          <a:lnRef idx="1">
+            <a:schemeClr val="accent1"/>
+          </a:lnRef>
+          <a:fillRef idx="3">
+            <a:schemeClr val="accent1"/>
+          </a:fillRef>
+          <a:effectRef idx="2">
+            <a:schemeClr val="accent1"/>
+          </a:effectRef>
+          <a:fontRef idx="minor">
+            <a:schemeClr val="lt1"/>
+          </a:fontRef>
+        </p:style>
+        <p:txBody>
+          <a:bodyPr rtlCol="0" anchor="ctr"/>
+          <a:lstStyle/>
+          <a:p>
+            <a:pPr algn="ctr"/>
+          </a:p>
+        </p:txBody>
+      </p:sp>
+      <p:sp>
+        <p:nvSpPr>
+          <p:cNvPr id="16" name="TextBox 15"/>
+          <p:cNvSpPr txBox="1"/>
+          <p:nvPr/>
+        </p:nvSpPr>
+        <p:spPr>
+          <a:xfrm>
+            <a:off x="975360" y="5608320"/>
+            <a:ext cx="2438400" cy="243840"/>
+          </a:xfrm>
+          <a:prstGeom prst="rect">
+            <a:avLst/>
+          </a:prstGeom>
+          <a:noFill/>
+        </p:spPr>
+        <p:txBody>
+          <a:bodyPr wrap="none" lIns="0" rIns="0" tIns="0" bIns="0">
+            <a:spAutoFit/>
+          </a:bodyPr>
+          <a:lstStyle/>
+          <a:p>
+            <a:r>
+              <a:rPr b="1" sz="1200">
+                <a:solidFill>
+                  <a:srgbClr val="003366"/>
+                </a:solidFill>
+                <a:latin typeface="Yu Gothic"/>
+              </a:rPr>
+              <a:t>多言語対応</a:t>
+            </a:r>
+          </a:p>
+        </p:txBody>
+      </p:sp>
+      <p:sp>
+        <p:nvSpPr>
+          <p:cNvPr id="17" name="TextBox 16"/>
+          <p:cNvSpPr txBox="1"/>
+          <p:nvPr/>
+        </p:nvSpPr>
+        <p:spPr>
+          <a:xfrm>
+            <a:off x="975360" y="5852160"/>
+            <a:ext cx="2438400" cy="365760"/>
+          </a:xfrm>
+          <a:prstGeom prst="rect">
+            <a:avLst/>
+          </a:prstGeom>
+          <a:noFill/>
+        </p:spPr>
+        <p:txBody>
+          <a:bodyPr wrap="none" lIns="0" rIns="0" tIns="0" bIns="0">
+            <a:spAutoFit/>
+          </a:bodyPr>
+          <a:lstStyle/>
+          <a:p>
+            <a:r>
+              <a:rPr b="0" sz="900">
+                <a:solidFill>
+                  <a:srgbClr val="555555"/>
+                </a:solidFill>
+                <a:latin typeface="Yu Gothic"/>
+              </a:rPr>
+              <a:t>英語をはじめ、フランス語・スペイン語・ドイツ語・中国語（簡体字/繁体字）など幅広く対応可能です。</a:t>
+            </a:r>
+          </a:p>
+        </p:txBody>
+      </p:sp>
+      <p:sp>
+        <p:nvSpPr>
+          <p:cNvPr id="18" name="Oval 17"/>
+          <p:cNvSpPr/>
+          <p:nvPr/>
+        </p:nvSpPr>
+        <p:spPr>
+          <a:xfrm>
+            <a:off x="406400" y="6583680"/>
+            <a:ext cx="406400" cy="609600"/>
+          </a:xfrm>
+          <a:prstGeom prst="ellipse">
+            <a:avLst/>
+          </a:prstGeom>
+          <a:solidFill>
+            <a:srgbClr val="E6F2FF"/>
+          </a:solidFill>
+          <a:ln w="15000">
+            <a:solidFill>
+              <a:srgbClr val="004098"/>
+            </a:solidFill>
+          </a:ln>
+        </p:spPr>
+        <p:style>
+          <a:lnRef idx="1">
+            <a:schemeClr val="accent1"/>
+          </a:lnRef>
+          <a:fillRef idx="3">
+            <a:schemeClr val="accent1"/>
+          </a:fillRef>
+          <a:effectRef idx="2">
+            <a:schemeClr val="accent1"/>
+          </a:effectRef>
+          <a:fontRef idx="minor">
+            <a:schemeClr val="lt1"/>
+          </a:fontRef>
+        </p:style>
+        <p:txBody>
+          <a:bodyPr rtlCol="0" anchor="ctr"/>
+          <a:lstStyle/>
+          <a:p>
+            <a:pPr algn="ctr"/>
+          </a:p>
+        </p:txBody>
+      </p:sp>
+      <p:sp>
+        <p:nvSpPr>
+          <p:cNvPr id="19" name="TextBox 18"/>
+          <p:cNvSpPr txBox="1"/>
+          <p:nvPr/>
+        </p:nvSpPr>
+        <p:spPr>
+          <a:xfrm>
+            <a:off x="975360" y="6461760"/>
+            <a:ext cx="2438400" cy="243840"/>
+          </a:xfrm>
+          <a:prstGeom prst="rect">
+            <a:avLst/>
+          </a:prstGeom>
+          <a:noFill/>
+        </p:spPr>
+        <p:txBody>
+          <a:bodyPr wrap="none" lIns="0" rIns="0" tIns="0" bIns="0">
+            <a:spAutoFit/>
+          </a:bodyPr>
+          <a:lstStyle/>
+          <a:p>
+            <a:r>
+              <a:rPr b="1" sz="1200">
+                <a:solidFill>
+                  <a:srgbClr val="003366"/>
+                </a:solidFill>
+                <a:latin typeface="Yu Gothic"/>
+              </a:rPr>
+              <a:t>スピーディーな納品</a:t>
+            </a:r>
+          </a:p>
+        </p:txBody>
+      </p:sp>
+      <p:sp>
+        <p:nvSpPr>
+          <p:cNvPr id="20" name="TextBox 19"/>
+          <p:cNvSpPr txBox="1"/>
+          <p:nvPr/>
+        </p:nvSpPr>
+        <p:spPr>
+          <a:xfrm>
+            <a:off x="975360" y="6705600"/>
+            <a:ext cx="2438400" cy="365760"/>
+          </a:xfrm>
+          <a:prstGeom prst="rect">
+            <a:avLst/>
+          </a:prstGeom>
+          <a:noFill/>
+        </p:spPr>
+        <p:txBody>
+          <a:bodyPr wrap="none" lIns="0" rIns="0" tIns="0" bIns="0">
+            <a:spAutoFit/>
+          </a:bodyPr>
+          <a:lstStyle/>
+          <a:p>
+            <a:r>
+              <a:rPr b="0" sz="900">
+                <a:solidFill>
+                  <a:srgbClr val="555555"/>
+                </a:solidFill>
+                <a:latin typeface="Yu Gothic"/>
+              </a:rPr>
+              <a:t>効率的なワークフローと専用ツールを活用し、高品質かつ短納期での納品を実現します。</a:t>
+            </a:r>
+          </a:p>
+        </p:txBody>
+      </p:sp>
+      <p:sp>
+        <p:nvSpPr>
+          <p:cNvPr id="21" name="Rounded Rectangle 20"/>
+          <p:cNvSpPr/>
+          <p:nvPr/>
+        </p:nvSpPr>
+        <p:spPr>
+          <a:xfrm>
+            <a:off x="3657600" y="2560320"/>
+            <a:ext cx="4226560" cy="365760"/>
+          </a:xfrm>
+          <a:prstGeom prst="roundRect">
+            <a:avLst/>
+          </a:prstGeom>
+          <a:solidFill>
+            <a:srgbClr val="004098"/>
+          </a:solidFill>
+          <a:ln w="15000">
+            <a:solidFill>
+              <a:srgbClr val="004098"/>
+            </a:solidFill>
+          </a:ln>
+        </p:spPr>
+        <p:style>
+          <a:lnRef idx="1">
+            <a:schemeClr val="accent1"/>
+          </a:lnRef>
+          <a:fillRef idx="3">
+            <a:schemeClr val="accent1"/>
+          </a:fillRef>
+          <a:effectRef idx="2">
+            <a:schemeClr val="accent1"/>
+          </a:effectRef>
+          <a:fontRef idx="minor">
+            <a:schemeClr val="lt1"/>
+          </a:fontRef>
+        </p:style>
+        <p:txBody>
+          <a:bodyPr rtlCol="0" anchor="ctr" lIns="70000" rIns="70000" tIns="50000" bIns="50000" wrap="square"/>
+          <a:lstStyle/>
+          <a:p>
+            <a:pPr algn="ctr"/>
+            <a:r>
+              <a:rPr b="1" sz="1200">
+                <a:solidFill>
+                  <a:srgbClr val="FFFFFF"/>
+                </a:solidFill>
+                <a:latin typeface="Yu Gothic"/>
+              </a:rPr>
+              <a:t>2 翻訳サンプル（英語）</a:t>
+            </a:r>
+          </a:p>
+        </p:txBody>
+      </p:sp>
+      <p:sp>
+        <p:nvSpPr>
+          <p:cNvPr id="22" name="Rectangle 21"/>
+          <p:cNvSpPr/>
+          <p:nvPr/>
+        </p:nvSpPr>
+        <p:spPr>
+          <a:xfrm>
+            <a:off x="3657600" y="3048000"/>
+            <a:ext cx="1869440" cy="365760"/>
+          </a:xfrm>
+          <a:prstGeom prst="rect">
+            <a:avLst/>
+          </a:prstGeom>
+          <a:solidFill>
+            <a:srgbClr val="E6F2FF"/>
+          </a:solidFill>
+          <a:ln w="15000">
+            <a:solidFill>
+              <a:srgbClr val="004098"/>
+            </a:solidFill>
+          </a:ln>
+        </p:spPr>
+        <p:style>
+          <a:lnRef idx="1">
+            <a:schemeClr val="accent1"/>
+          </a:lnRef>
+          <a:fillRef idx="3">
+            <a:schemeClr val="accent1"/>
+          </a:fillRef>
+          <a:effectRef idx="2">
+            <a:schemeClr val="accent1"/>
+          </a:effectRef>
+          <a:fontRef idx="minor">
+            <a:schemeClr val="lt1"/>
+          </a:fontRef>
+        </p:style>
+        <p:txBody>
+          <a:bodyPr rtlCol="0" anchor="ctr" lIns="70000" rIns="70000" tIns="50000" bIns="50000" wrap="square"/>
+          <a:lstStyle/>
+          <a:p>
+            <a:pPr algn="ctr"/>
+            <a:r>
+              <a:rPr b="1" sz="1000">
+                <a:solidFill>
+                  <a:srgbClr val="003366"/>
+                </a:solidFill>
+                <a:latin typeface="Yu Gothic"/>
+              </a:rPr>
+              <a:t>日本語（原文）</a:t>
+            </a:r>
+          </a:p>
+        </p:txBody>
+      </p:sp>
+      <p:sp>
+        <p:nvSpPr>
+          <p:cNvPr id="23" name="Rectangle 22"/>
+          <p:cNvSpPr/>
+          <p:nvPr/>
+        </p:nvSpPr>
+        <p:spPr>
+          <a:xfrm>
+            <a:off x="5852160" y="3048000"/>
+            <a:ext cx="1869440" cy="365760"/>
+          </a:xfrm>
+          <a:prstGeom prst="rect">
+            <a:avLst/>
+          </a:prstGeom>
+          <a:solidFill>
+            <a:srgbClr val="E6F2FF"/>
+          </a:solidFill>
+          <a:ln w="15000">
+            <a:solidFill>
+              <a:srgbClr val="004098"/>
+            </a:solidFill>
+          </a:ln>
+        </p:spPr>
+        <p:style>
+          <a:lnRef idx="1">
+            <a:schemeClr val="accent1"/>
+          </a:lnRef>
+          <a:fillRef idx="3">
+            <a:schemeClr val="accent1"/>
+          </a:fillRef>
+          <a:effectRef idx="2">
+            <a:schemeClr val="accent1"/>
+          </a:effectRef>
+          <a:fontRef idx="minor">
+            <a:schemeClr val="lt1"/>
+          </a:fontRef>
+        </p:style>
+        <p:txBody>
+          <a:bodyPr rtlCol="0" anchor="ctr" lIns="70000" rIns="70000" tIns="50000" bIns="50000" wrap="square"/>
+          <a:lstStyle/>
+          <a:p>
+            <a:pPr algn="ctr"/>
+            <a:r>
+              <a:rPr b="1" sz="1000">
+                <a:solidFill>
+                  <a:srgbClr val="003366"/>
+                </a:solidFill>
+                <a:latin typeface="Yu Gothic"/>
+              </a:rPr>
+              <a:t>英語（翻訳後）</a:t>
+            </a:r>
+          </a:p>
+        </p:txBody>
+      </p:sp>
+      <p:sp>
+        <p:nvSpPr>
+          <p:cNvPr id="24" name="TextBox 23"/>
+          <p:cNvSpPr txBox="1"/>
+          <p:nvPr/>
+        </p:nvSpPr>
+        <p:spPr>
+          <a:xfrm>
+            <a:off x="3657600" y="8290560"/>
+            <a:ext cx="4226560" cy="243840"/>
+          </a:xfrm>
+          <a:prstGeom prst="rect">
+            <a:avLst/>
+          </a:prstGeom>
+          <a:noFill/>
+        </p:spPr>
+        <p:txBody>
+          <a:bodyPr wrap="none" lIns="0" rIns="0" tIns="0" bIns="0">
+            <a:spAutoFit/>
+          </a:bodyPr>
+          <a:lstStyle/>
+          <a:p>
+            <a:r>
+              <a:rPr b="0" sz="900">
+                <a:solidFill>
+                  <a:srgbClr val="555555"/>
+                </a:solidFill>
+                <a:latin typeface="Yu Gothic"/>
+              </a:rPr>
+              <a:t>※レイアウト・フォント・雰囲気はオリジナルのまま、自然な表現に翻訳します。</a:t>
+            </a:r>
+          </a:p>
+        </p:txBody>
+      </p:sp>
+      <p:sp>
+        <p:nvSpPr>
+          <p:cNvPr id="25" name="Rounded Rectangle 24"/>
+          <p:cNvSpPr/>
+          <p:nvPr/>
+        </p:nvSpPr>
+        <p:spPr>
+          <a:xfrm>
+            <a:off x="243840" y="7437120"/>
+            <a:ext cx="3169920" cy="365760"/>
+          </a:xfrm>
+          <a:prstGeom prst="roundRect">
+            <a:avLst/>
+          </a:prstGeom>
+          <a:solidFill>
+            <a:srgbClr val="004098"/>
+          </a:solidFill>
+          <a:ln w="15000">
+            <a:solidFill>
+              <a:srgbClr val="004098"/>
+            </a:solidFill>
+          </a:ln>
+        </p:spPr>
+        <p:style>
+          <a:lnRef idx="1">
+            <a:schemeClr val="accent1"/>
+          </a:lnRef>
+          <a:fillRef idx="3">
+            <a:schemeClr val="accent1"/>
+          </a:fillRef>
+          <a:effectRef idx="2">
+            <a:schemeClr val="accent1"/>
+          </a:effectRef>
+          <a:fontRef idx="minor">
+            <a:schemeClr val="lt1"/>
+          </a:fontRef>
+        </p:style>
+        <p:txBody>
+          <a:bodyPr rtlCol="0" anchor="ctr" lIns="70000" rIns="70000" tIns="50000" bIns="50000" wrap="square"/>
+          <a:lstStyle/>
+          <a:p>
+            <a:pPr algn="ctr"/>
+            <a:r>
+              <a:rPr b="1" sz="1200">
+                <a:solidFill>
+                  <a:srgbClr val="FFFFFF"/>
+                </a:solidFill>
+                <a:latin typeface="Yu Gothic"/>
+              </a:rPr>
+              <a:t>3 制作の流れ</a:t>
+            </a:r>
+          </a:p>
+        </p:txBody>
+      </p:sp>
+      <p:sp>
+        <p:nvSpPr>
+          <p:cNvPr id="26" name="Rounded Rectangle 25"/>
+          <p:cNvSpPr/>
+          <p:nvPr/>
+        </p:nvSpPr>
+        <p:spPr>
+          <a:xfrm>
+            <a:off x="243840" y="7924800"/>
+            <a:ext cx="650240" cy="975360"/>
+          </a:xfrm>
+          <a:prstGeom prst="roundRect">
+            <a:avLst/>
+          </a:prstGeom>
+          <a:solidFill>
+            <a:srgbClr val="FFFFFF"/>
+          </a:solidFill>
+          <a:ln w="15000">
+            <a:solidFill>
+              <a:srgbClr val="004098"/>
+            </a:solidFill>
+          </a:ln>
+        </p:spPr>
+        <p:style>
+          <a:lnRef idx="1">
+            <a:schemeClr val="accent1"/>
+          </a:lnRef>
+          <a:fillRef idx="3">
+            <a:schemeClr val="accent1"/>
+          </a:fillRef>
+          <a:effectRef idx="2">
+            <a:schemeClr val="accent1"/>
+          </a:effectRef>
+          <a:fontRef idx="minor">
+            <a:schemeClr val="lt1"/>
+          </a:fontRef>
+        </p:style>
+        <p:txBody>
+          <a:bodyPr rtlCol="0" anchor="ctr" lIns="70000" rIns="70000" tIns="50000" bIns="50000" wrap="square"/>
+          <a:lstStyle/>
+          <a:p>
+            <a:pPr algn="ctr"/>
+            <a:r>
+              <a:rPr b="1" sz="1000">
+                <a:solidFill>
+                  <a:srgbClr val="003366"/>
+                </a:solidFill>
+                <a:latin typeface="Yu Gothic"/>
+              </a:rPr>
+              <a:t>お見積り</a:t>
+            </a:r>
+          </a:p>
+          <a:p>
+            <a:r>
+              <a:rPr b="1" sz="800">
+                <a:solidFill>
+                  <a:srgbClr val="003366"/>
+                </a:solidFill>
+                <a:latin typeface="Yu Gothic"/>
+              </a:rPr>
+              <a:t>ご相談</a:t>
+            </a:r>
+          </a:p>
+        </p:txBody>
+      </p:sp>
+      <p:sp>
+        <p:nvSpPr>
+          <p:cNvPr id="27" name="Rounded Rectangle 26"/>
+          <p:cNvSpPr/>
+          <p:nvPr/>
+        </p:nvSpPr>
+        <p:spPr>
+          <a:xfrm>
+            <a:off x="1056640" y="7924800"/>
+            <a:ext cx="650240" cy="975360"/>
+          </a:xfrm>
+          <a:prstGeom prst="roundRect">
+            <a:avLst/>
+          </a:prstGeom>
+          <a:solidFill>
+            <a:srgbClr val="FFFFFF"/>
+          </a:solidFill>
+          <a:ln w="15000">
+            <a:solidFill>
+              <a:srgbClr val="004098"/>
+            </a:solidFill>
+          </a:ln>
+        </p:spPr>
+        <p:style>
+          <a:lnRef idx="1">
+            <a:schemeClr val="accent1"/>
+          </a:lnRef>
+          <a:fillRef idx="3">
+            <a:schemeClr val="accent1"/>
+          </a:fillRef>
+          <a:effectRef idx="2">
+            <a:schemeClr val="accent1"/>
+          </a:effectRef>
+          <a:fontRef idx="minor">
+            <a:schemeClr val="lt1"/>
+          </a:fontRef>
+        </p:style>
+        <p:txBody>
+          <a:bodyPr rtlCol="0" anchor="ctr" lIns="70000" rIns="70000" tIns="50000" bIns="50000" wrap="square"/>
+          <a:lstStyle/>
+          <a:p>
+            <a:pPr algn="ctr"/>
+            <a:r>
+              <a:rPr b="1" sz="1000">
+                <a:solidFill>
+                  <a:srgbClr val="003366"/>
+                </a:solidFill>
+                <a:latin typeface="Yu Gothic"/>
+              </a:rPr>
+              <a:t>翻訳</a:t>
+            </a:r>
+          </a:p>
+        </p:txBody>
+      </p:sp>
+      <p:sp>
+        <p:nvSpPr>
+          <p:cNvPr id="28" name="Rounded Rectangle 27"/>
+          <p:cNvSpPr/>
+          <p:nvPr/>
+        </p:nvSpPr>
+        <p:spPr>
+          <a:xfrm>
+            <a:off x="1869440" y="7924800"/>
+            <a:ext cx="650240" cy="975360"/>
+          </a:xfrm>
+          <a:prstGeom prst="roundRect">
+            <a:avLst/>
+          </a:prstGeom>
+          <a:solidFill>
+            <a:srgbClr val="FFFFFF"/>
+          </a:solidFill>
+          <a:ln w="15000">
+            <a:solidFill>
+              <a:srgbClr val="004098"/>
+            </a:solidFill>
+          </a:ln>
+        </p:spPr>
+        <p:style>
+          <a:lnRef idx="1">
+            <a:schemeClr val="accent1"/>
+          </a:lnRef>
+          <a:fillRef idx="3">
+            <a:schemeClr val="accent1"/>
+          </a:fillRef>
+          <a:effectRef idx="2">
+            <a:schemeClr val="accent1"/>
+          </a:effectRef>
+          <a:fontRef idx="minor">
+            <a:schemeClr val="lt1"/>
+          </a:fontRef>
+        </p:style>
+        <p:txBody>
+          <a:bodyPr rtlCol="0" anchor="ctr" lIns="70000" rIns="70000" tIns="50000" bIns="50000" wrap="square"/>
+          <a:lstStyle/>
+          <a:p>
+            <a:pPr algn="ctr"/>
+            <a:r>
+              <a:rPr b="1" sz="1000">
+                <a:solidFill>
+                  <a:srgbClr val="003366"/>
+                </a:solidFill>
+                <a:latin typeface="Yu Gothic"/>
+              </a:rPr>
+              <a:t>チェック・編集</a:t>
+            </a:r>
+          </a:p>
+        </p:txBody>
+      </p:sp>
+      <p:sp>
+        <p:nvSpPr>
+          <p:cNvPr id="29" name="Rounded Rectangle 28"/>
+          <p:cNvSpPr/>
+          <p:nvPr/>
+        </p:nvSpPr>
+        <p:spPr>
+          <a:xfrm>
+            <a:off x="2682240" y="7924800"/>
+            <a:ext cx="650240" cy="975360"/>
+          </a:xfrm>
+          <a:prstGeom prst="roundRect">
+            <a:avLst/>
+          </a:prstGeom>
+          <a:solidFill>
+            <a:srgbClr val="FFFFFF"/>
+          </a:solidFill>
+          <a:ln w="15000">
+            <a:solidFill>
+              <a:srgbClr val="004098"/>
+            </a:solidFill>
+          </a:ln>
+        </p:spPr>
+        <p:style>
+          <a:lnRef idx="1">
+            <a:schemeClr val="accent1"/>
+          </a:lnRef>
+          <a:fillRef idx="3">
+            <a:schemeClr val="accent1"/>
+          </a:fillRef>
+          <a:effectRef idx="2">
+            <a:schemeClr val="accent1"/>
+          </a:effectRef>
+          <a:fontRef idx="minor">
+            <a:schemeClr val="lt1"/>
+          </a:fontRef>
+        </p:style>
+        <p:txBody>
+          <a:bodyPr rtlCol="0" anchor="ctr" lIns="70000" rIns="70000" tIns="50000" bIns="50000" wrap="square"/>
+          <a:lstStyle/>
+          <a:p>
+            <a:pPr algn="ctr"/>
+            <a:r>
+              <a:rPr b="1" sz="1000">
+                <a:solidFill>
+                  <a:srgbClr val="003366"/>
+                </a:solidFill>
+                <a:latin typeface="Yu Gothic"/>
+              </a:rPr>
+              <a:t>納品</a:t>
+            </a:r>
+          </a:p>
+        </p:txBody>
+      </p:sp>
+      <p:sp>
+        <p:nvSpPr>
+          <p:cNvPr id="30" name="TextBox 29"/>
+          <p:cNvSpPr txBox="1"/>
+          <p:nvPr/>
+        </p:nvSpPr>
+        <p:spPr>
+          <a:xfrm>
+            <a:off x="243840" y="9022080"/>
+            <a:ext cx="650240" cy="487680"/>
+          </a:xfrm>
+          <a:prstGeom prst="rect">
+            <a:avLst/>
+          </a:prstGeom>
+          <a:noFill/>
+        </p:spPr>
+        <p:txBody>
+          <a:bodyPr wrap="none" lIns="0" rIns="0" tIns="0" bIns="0">
+            <a:spAutoFit/>
+          </a:bodyPr>
+          <a:lstStyle/>
+          <a:p>
+            <a:r>
+              <a:rPr b="0" sz="800">
+                <a:solidFill>
+                  <a:srgbClr val="333333"/>
+                </a:solidFill>
+                <a:latin typeface="Yu Gothic"/>
+              </a:rPr>
+              <a:t>ご要望・仕様を
+ヒアリング</a:t>
+            </a:r>
+          </a:p>
+        </p:txBody>
+      </p:sp>
+      <p:sp>
+        <p:nvSpPr>
+          <p:cNvPr id="31" name="TextBox 30"/>
+          <p:cNvSpPr txBox="1"/>
+          <p:nvPr/>
+        </p:nvSpPr>
+        <p:spPr>
+          <a:xfrm>
+            <a:off x="1056640" y="9022080"/>
+            <a:ext cx="650240" cy="487680"/>
+          </a:xfrm>
+          <a:prstGeom prst="rect">
+            <a:avLst/>
+          </a:prstGeom>
+          <a:noFill/>
+        </p:spPr>
+        <p:txBody>
+          <a:bodyPr wrap="none" lIns="0" rIns="0" tIns="0" bIns="0">
+            <a:spAutoFit/>
+          </a:bodyPr>
+          <a:lstStyle/>
+          <a:p>
+            <a:r>
+              <a:rPr b="0" sz="800">
+                <a:solidFill>
+                  <a:srgbClr val="333333"/>
+                </a:solidFill>
+                <a:latin typeface="Yu Gothic"/>
+              </a:rPr>
+              <a:t>マンガに最適化した
+翻訳を実施</a:t>
+            </a:r>
+          </a:p>
+        </p:txBody>
+      </p:sp>
+      <p:sp>
+        <p:nvSpPr>
+          <p:cNvPr id="32" name="TextBox 31"/>
+          <p:cNvSpPr txBox="1"/>
+          <p:nvPr/>
+        </p:nvSpPr>
+        <p:spPr>
+          <a:xfrm>
+            <a:off x="1869440" y="9022080"/>
+            <a:ext cx="650240" cy="487680"/>
+          </a:xfrm>
+          <a:prstGeom prst="rect">
+            <a:avLst/>
+          </a:prstGeom>
+          <a:noFill/>
+        </p:spPr>
+        <p:txBody>
+          <a:bodyPr wrap="none" lIns="0" rIns="0" tIns="0" bIns="0">
+            <a:spAutoFit/>
+          </a:bodyPr>
+          <a:lstStyle/>
+          <a:p>
+            <a:r>
+              <a:rPr b="0" sz="800">
+                <a:solidFill>
+                  <a:srgbClr val="333333"/>
+                </a:solidFill>
+                <a:latin typeface="Yu Gothic"/>
+              </a:rPr>
+              <a:t>ネイティブチェックと
+品質チェック</a:t>
+            </a:r>
+          </a:p>
+        </p:txBody>
+      </p:sp>
+      <p:sp>
+        <p:nvSpPr>
+          <p:cNvPr id="33" name="TextBox 32"/>
+          <p:cNvSpPr txBox="1"/>
+          <p:nvPr/>
+        </p:nvSpPr>
+        <p:spPr>
+          <a:xfrm>
+            <a:off x="2682240" y="9022080"/>
+            <a:ext cx="650240" cy="487680"/>
+          </a:xfrm>
+          <a:prstGeom prst="rect">
+            <a:avLst/>
+          </a:prstGeom>
+          <a:noFill/>
+        </p:spPr>
+        <p:txBody>
+          <a:bodyPr wrap="none" lIns="0" rIns="0" tIns="0" bIns="0">
+            <a:spAutoFit/>
+          </a:bodyPr>
+          <a:lstStyle/>
+          <a:p>
+            <a:r>
+              <a:rPr b="0" sz="800">
+                <a:solidFill>
+                  <a:srgbClr val="333333"/>
+                </a:solidFill>
+                <a:latin typeface="Yu Gothic"/>
+              </a:rPr>
+              <a:t>ご希望の形式で
+納品</a:t>
+            </a:r>
+          </a:p>
+        </p:txBody>
+      </p:sp>
+      <p:sp>
+        <p:nvSpPr>
+          <p:cNvPr id="34" name="Rounded Rectangle 33"/>
+          <p:cNvSpPr/>
+          <p:nvPr/>
+        </p:nvSpPr>
+        <p:spPr>
+          <a:xfrm>
+            <a:off x="3657600" y="7437120"/>
+            <a:ext cx="4226560" cy="365760"/>
+          </a:xfrm>
+          <a:prstGeom prst="roundRect">
+            <a:avLst/>
+          </a:prstGeom>
+          <a:solidFill>
+            <a:srgbClr val="004098"/>
+          </a:solidFill>
+          <a:ln w="15000">
+            <a:solidFill>
+              <a:srgbClr val="004098"/>
+            </a:solidFill>
+          </a:ln>
+        </p:spPr>
+        <p:style>
+          <a:lnRef idx="1">
+            <a:schemeClr val="accent1"/>
+          </a:lnRef>
+          <a:fillRef idx="3">
+            <a:schemeClr val="accent1"/>
+          </a:fillRef>
+          <a:effectRef idx="2">
+            <a:schemeClr val="accent1"/>
+          </a:effectRef>
+          <a:fontRef idx="minor">
+            <a:schemeClr val="lt1"/>
+          </a:fontRef>
+        </p:style>
+        <p:txBody>
+          <a:bodyPr rtlCol="0" anchor="ctr" lIns="70000" rIns="70000" tIns="50000" bIns="50000" wrap="square"/>
+          <a:lstStyle/>
+          <a:p>
+            <a:pPr algn="ctr"/>
+            <a:r>
+              <a:rPr b="1" sz="1200">
+                <a:solidFill>
+                  <a:srgbClr val="FFFFFF"/>
+                </a:solidFill>
+                <a:latin typeface="Yu Gothic"/>
+              </a:rPr>
+              <a:t>4 対応言語・納品形式</a:t>
+            </a:r>
+          </a:p>
+        </p:txBody>
+      </p:sp>
+      <p:sp>
+        <p:nvSpPr>
+          <p:cNvPr id="35" name="Rectangle 34"/>
+          <p:cNvSpPr/>
+          <p:nvPr/>
+        </p:nvSpPr>
+        <p:spPr>
+          <a:xfrm>
+            <a:off x="3738880" y="7924800"/>
+            <a:ext cx="1219200" cy="243840"/>
+          </a:xfrm>
+          <a:prstGeom prst="rect">
+            <a:avLst/>
+          </a:prstGeom>
+          <a:solidFill>
+            <a:srgbClr val="E6F2FF"/>
+          </a:solidFill>
+          <a:ln w="15000">
+            <a:solidFill>
+              <a:srgbClr val="004098"/>
+            </a:solidFill>
+          </a:ln>
+        </p:spPr>
+        <p:style>
+          <a:lnRef idx="1">
+            <a:schemeClr val="accent1"/>
+          </a:lnRef>
+          <a:fillRef idx="3">
+            <a:schemeClr val="accent1"/>
+          </a:fillRef>
+          <a:effectRef idx="2">
+            <a:schemeClr val="accent1"/>
+          </a:effectRef>
+          <a:fontRef idx="minor">
+            <a:schemeClr val="lt1"/>
+          </a:fontRef>
+        </p:style>
+        <p:txBody>
+          <a:bodyPr rtlCol="0" anchor="ctr" lIns="70000" rIns="70000" tIns="50000" bIns="50000" wrap="square"/>
+          <a:lstStyle/>
+          <a:p>
+            <a:pPr algn="ctr"/>
+            <a:r>
+              <a:rPr b="1" sz="900">
+                <a:solidFill>
+                  <a:srgbClr val="003366"/>
+                </a:solidFill>
+                <a:latin typeface="Yu Gothic"/>
+              </a:rPr>
+              <a:t>対応言語（一例）</a:t>
+            </a:r>
+          </a:p>
+        </p:txBody>
+      </p:sp>
+      <p:sp>
+        <p:nvSpPr>
+          <p:cNvPr id="36" name="TextBox 35"/>
+          <p:cNvSpPr txBox="1"/>
+          <p:nvPr/>
+        </p:nvSpPr>
+        <p:spPr>
+          <a:xfrm>
+            <a:off x="3738880" y="8778240"/>
+            <a:ext cx="568960" cy="243840"/>
+          </a:xfrm>
+          <a:prstGeom prst="rect">
+            <a:avLst/>
+          </a:prstGeom>
+          <a:noFill/>
+        </p:spPr>
+        <p:txBody>
+          <a:bodyPr wrap="none" lIns="0" rIns="0" tIns="0" bIns="0">
+            <a:spAutoFit/>
+          </a:bodyPr>
+          <a:lstStyle/>
+          <a:p>
+            <a:r>
+              <a:rPr b="0" sz="800">
+                <a:solidFill>
+                  <a:srgbClr val="333333"/>
+                </a:solidFill>
+                <a:latin typeface="Yu Gothic"/>
+              </a:rPr>
+              <a:t>英語</a:t>
+            </a:r>
+          </a:p>
+        </p:txBody>
+      </p:sp>
+      <p:sp>
+        <p:nvSpPr>
+          <p:cNvPr id="37" name="TextBox 36"/>
+          <p:cNvSpPr txBox="1"/>
+          <p:nvPr/>
+        </p:nvSpPr>
+        <p:spPr>
+          <a:xfrm>
+            <a:off x="4389120" y="8778240"/>
+            <a:ext cx="568960" cy="243840"/>
+          </a:xfrm>
+          <a:prstGeom prst="rect">
+            <a:avLst/>
+          </a:prstGeom>
+          <a:noFill/>
+        </p:spPr>
+        <p:txBody>
+          <a:bodyPr wrap="none" lIns="0" rIns="0" tIns="0" bIns="0">
+            <a:spAutoFit/>
+          </a:bodyPr>
+          <a:lstStyle/>
+          <a:p>
+            <a:r>
+              <a:rPr b="0" sz="800">
+                <a:solidFill>
+                  <a:srgbClr val="333333"/>
+                </a:solidFill>
+                <a:latin typeface="Yu Gothic"/>
+              </a:rPr>
+              <a:t>フランス語</a:t>
+            </a:r>
+          </a:p>
+        </p:txBody>
+      </p:sp>
+      <p:sp>
+        <p:nvSpPr>
+          <p:cNvPr id="38" name="TextBox 37"/>
+          <p:cNvSpPr txBox="1"/>
+          <p:nvPr/>
+        </p:nvSpPr>
+        <p:spPr>
+          <a:xfrm>
+            <a:off x="5039360" y="8778240"/>
+            <a:ext cx="568960" cy="243840"/>
+          </a:xfrm>
+          <a:prstGeom prst="rect">
+            <a:avLst/>
+          </a:prstGeom>
+          <a:noFill/>
+        </p:spPr>
+        <p:txBody>
+          <a:bodyPr wrap="none" lIns="0" rIns="0" tIns="0" bIns="0">
+            <a:spAutoFit/>
+          </a:bodyPr>
+          <a:lstStyle/>
+          <a:p>
+            <a:r>
+              <a:rPr b="0" sz="800">
+                <a:solidFill>
+                  <a:srgbClr val="333333"/>
+                </a:solidFill>
+                <a:latin typeface="Yu Gothic"/>
+              </a:rPr>
+              <a:t>スペイン語</a:t>
+            </a:r>
+          </a:p>
+        </p:txBody>
+      </p:sp>
+      <p:sp>
+        <p:nvSpPr>
+          <p:cNvPr id="39" name="TextBox 38"/>
+          <p:cNvSpPr txBox="1"/>
+          <p:nvPr/>
+        </p:nvSpPr>
+        <p:spPr>
+          <a:xfrm>
+            <a:off x="5689600" y="8778240"/>
+            <a:ext cx="568960" cy="243840"/>
+          </a:xfrm>
+          <a:prstGeom prst="rect">
+            <a:avLst/>
+          </a:prstGeom>
+          <a:noFill/>
+        </p:spPr>
+        <p:txBody>
+          <a:bodyPr wrap="none" lIns="0" rIns="0" tIns="0" bIns="0">
+            <a:spAutoFit/>
+          </a:bodyPr>
+          <a:lstStyle/>
+          <a:p>
+            <a:r>
+              <a:rPr b="0" sz="800">
+                <a:solidFill>
+                  <a:srgbClr val="333333"/>
+                </a:solidFill>
+                <a:latin typeface="Yu Gothic"/>
+              </a:rPr>
+              <a:t>ドイツ語</a:t>
+            </a:r>
+          </a:p>
+        </p:txBody>
+      </p:sp>
+      <p:sp>
+        <p:nvSpPr>
+          <p:cNvPr id="40" name="TextBox 39"/>
+          <p:cNvSpPr txBox="1"/>
+          <p:nvPr/>
+        </p:nvSpPr>
+        <p:spPr>
+          <a:xfrm>
+            <a:off x="6339840" y="8778240"/>
+            <a:ext cx="650240" cy="365760"/>
+          </a:xfrm>
+          <a:prstGeom prst="rect">
+            <a:avLst/>
+          </a:prstGeom>
+          <a:noFill/>
+        </p:spPr>
+        <p:txBody>
+          <a:bodyPr wrap="none" lIns="0" rIns="0" tIns="0" bIns="0">
+            <a:spAutoFit/>
+          </a:bodyPr>
+          <a:lstStyle/>
+          <a:p>
+            <a:r>
+              <a:rPr b="0" sz="800">
+                <a:solidFill>
+                  <a:srgbClr val="333333"/>
+                </a:solidFill>
+                <a:latin typeface="Yu Gothic"/>
+              </a:rPr>
+              <a:t>中国語
+(簡体字)</a:t>
+            </a:r>
+          </a:p>
+        </p:txBody>
+      </p:sp>
+      <p:sp>
+        <p:nvSpPr>
+          <p:cNvPr id="41" name="TextBox 40"/>
+          <p:cNvSpPr txBox="1"/>
+          <p:nvPr/>
+        </p:nvSpPr>
+        <p:spPr>
+          <a:xfrm>
+            <a:off x="7071360" y="8778240"/>
+            <a:ext cx="650240" cy="365760"/>
+          </a:xfrm>
+          <a:prstGeom prst="rect">
+            <a:avLst/>
+          </a:prstGeom>
+          <a:noFill/>
+        </p:spPr>
+        <p:txBody>
+          <a:bodyPr wrap="none" lIns="0" rIns="0" tIns="0" bIns="0">
+            <a:spAutoFit/>
+          </a:bodyPr>
+          <a:lstStyle/>
+          <a:p>
+            <a:r>
+              <a:rPr b="0" sz="800">
+                <a:solidFill>
+                  <a:srgbClr val="333333"/>
+                </a:solidFill>
+                <a:latin typeface="Yu Gothic"/>
+              </a:rPr>
+              <a:t>中国語
+(繁体字)</a:t>
+            </a:r>
+          </a:p>
+        </p:txBody>
+      </p:sp>
+      <p:sp>
+        <p:nvSpPr>
+          <p:cNvPr id="42" name="Rectangle 41"/>
+          <p:cNvSpPr/>
+          <p:nvPr/>
+        </p:nvSpPr>
+        <p:spPr>
+          <a:xfrm>
+            <a:off x="3738880" y="9265920"/>
+            <a:ext cx="1219200" cy="243840"/>
+          </a:xfrm>
+          <a:prstGeom prst="rect">
+            <a:avLst/>
+          </a:prstGeom>
+          <a:solidFill>
+            <a:srgbClr val="E6F2FF"/>
+          </a:solidFill>
+          <a:ln w="15000">
+            <a:solidFill>
+              <a:srgbClr val="004098"/>
+            </a:solidFill>
+          </a:ln>
+        </p:spPr>
+        <p:style>
+          <a:lnRef idx="1">
+            <a:schemeClr val="accent1"/>
+          </a:lnRef>
+          <a:fillRef idx="3">
+            <a:schemeClr val="accent1"/>
+          </a:fillRef>
+          <a:effectRef idx="2">
+            <a:schemeClr val="accent1"/>
+          </a:effectRef>
+          <a:fontRef idx="minor">
+            <a:schemeClr val="lt1"/>
+          </a:fontRef>
+        </p:style>
+        <p:txBody>
+          <a:bodyPr rtlCol="0" anchor="ctr" lIns="70000" rIns="70000" tIns="50000" bIns="50000" wrap="square"/>
+          <a:lstStyle/>
+          <a:p>
+            <a:pPr algn="ctr"/>
+            <a:r>
+              <a:rPr b="1" sz="900">
+                <a:solidFill>
+                  <a:srgbClr val="003366"/>
+                </a:solidFill>
+                <a:latin typeface="Yu Gothic"/>
+              </a:rPr>
+              <a:t>納品形式</a:t>
+            </a:r>
+          </a:p>
+        </p:txBody>
+      </p:sp>
+      <p:sp>
+        <p:nvSpPr>
+          <p:cNvPr id="43" name="TextBox 42"/>
+          <p:cNvSpPr txBox="1"/>
+          <p:nvPr/>
+        </p:nvSpPr>
+        <p:spPr>
+          <a:xfrm>
+            <a:off x="4064000" y="9631680"/>
+            <a:ext cx="975360" cy="365760"/>
+          </a:xfrm>
+          <a:prstGeom prst="rect">
+            <a:avLst/>
+          </a:prstGeom>
+          <a:noFill/>
+        </p:spPr>
+        <p:txBody>
+          <a:bodyPr wrap="none" lIns="0" rIns="0" tIns="0" bIns="0">
+            <a:spAutoFit/>
+          </a:bodyPr>
+          <a:lstStyle/>
+          <a:p>
+            <a:r>
+              <a:rPr b="0" sz="800">
+                <a:solidFill>
+                  <a:srgbClr val="333333"/>
+                </a:solidFill>
+                <a:latin typeface="Yu Gothic"/>
+              </a:rPr>
+              <a:t>画像データ
+(PNG / JPG)</a:t>
+            </a:r>
+          </a:p>
+        </p:txBody>
+      </p:sp>
+      <p:sp>
+        <p:nvSpPr>
+          <p:cNvPr id="44" name="TextBox 43"/>
+          <p:cNvSpPr txBox="1"/>
+          <p:nvPr/>
+        </p:nvSpPr>
+        <p:spPr>
+          <a:xfrm>
+            <a:off x="5201920" y="9631680"/>
+            <a:ext cx="650240" cy="365760"/>
+          </a:xfrm>
+          <a:prstGeom prst="rect">
+            <a:avLst/>
+          </a:prstGeom>
+          <a:noFill/>
+        </p:spPr>
+        <p:txBody>
+          <a:bodyPr wrap="none" lIns="0" rIns="0" tIns="0" bIns="0">
+            <a:spAutoFit/>
+          </a:bodyPr>
+          <a:lstStyle/>
+          <a:p>
+            <a:r>
+              <a:rPr b="0" sz="800">
+                <a:solidFill>
+                  <a:srgbClr val="333333"/>
+                </a:solidFill>
+                <a:latin typeface="Yu Gothic"/>
+              </a:rPr>
+              <a:t>PDF</a:t>
+            </a:r>
+          </a:p>
+        </p:txBody>
+      </p:sp>
+      <p:sp>
+        <p:nvSpPr>
+          <p:cNvPr id="45" name="TextBox 44"/>
+          <p:cNvSpPr txBox="1"/>
+          <p:nvPr/>
+        </p:nvSpPr>
+        <p:spPr>
+          <a:xfrm>
+            <a:off x="5933440" y="9631680"/>
+            <a:ext cx="1219200" cy="365760"/>
+          </a:xfrm>
+          <a:prstGeom prst="rect">
+            <a:avLst/>
+          </a:prstGeom>
+          <a:noFill/>
+        </p:spPr>
+        <p:txBody>
+          <a:bodyPr wrap="none" lIns="0" rIns="0" tIns="0" bIns="0">
+            <a:spAutoFit/>
+          </a:bodyPr>
+          <a:lstStyle/>
+          <a:p>
+            <a:r>
+              <a:rPr b="0" sz="800">
+                <a:solidFill>
+                  <a:srgbClr val="333333"/>
+                </a:solidFill>
+                <a:latin typeface="Yu Gothic"/>
+              </a:rPr>
+              <a:t>PSD / TIFF
+(レイヤー納品可)</a:t>
+            </a:r>
+          </a:p>
+        </p:txBody>
+      </p:sp>
+      <p:sp>
+        <p:nvSpPr>
+          <p:cNvPr id="46" name="TextBox 45"/>
+          <p:cNvSpPr txBox="1"/>
+          <p:nvPr/>
+        </p:nvSpPr>
+        <p:spPr>
+          <a:xfrm>
+            <a:off x="7233920" y="9631680"/>
+            <a:ext cx="650240" cy="365760"/>
+          </a:xfrm>
+          <a:prstGeom prst="rect">
+            <a:avLst/>
+          </a:prstGeom>
+          <a:noFill/>
+        </p:spPr>
+        <p:txBody>
+          <a:bodyPr wrap="none" lIns="0" rIns="0" tIns="0" bIns="0">
+            <a:spAutoFit/>
+          </a:bodyPr>
+          <a:lstStyle/>
+          <a:p>
+            <a:r>
+              <a:rPr b="0" sz="800">
+                <a:solidFill>
+                  <a:srgbClr val="333333"/>
+                </a:solidFill>
+                <a:latin typeface="Yu Gothic"/>
+              </a:rPr>
+              <a:t>その他
+ご相談ください</a:t>
+            </a:r>
+          </a:p>
+        </p:txBody>
+      </p:sp>
+      <p:sp>
+        <p:nvSpPr>
+          <p:cNvPr id="47" name="Rounded Rectangle 46"/>
+          <p:cNvSpPr/>
+          <p:nvPr/>
+        </p:nvSpPr>
+        <p:spPr>
+          <a:xfrm>
+            <a:off x="243840" y="9875520"/>
+            <a:ext cx="3169920" cy="365760"/>
+          </a:xfrm>
+          <a:prstGeom prst="roundRect">
+            <a:avLst/>
+          </a:prstGeom>
+          <a:solidFill>
+            <a:srgbClr val="004098"/>
+          </a:solidFill>
+          <a:ln w="15000">
+            <a:solidFill>
+              <a:srgbClr val="004098"/>
+            </a:solidFill>
+          </a:ln>
+        </p:spPr>
+        <p:style>
+          <a:lnRef idx="1">
+            <a:schemeClr val="accent1"/>
+          </a:lnRef>
+          <a:fillRef idx="3">
+            <a:schemeClr val="accent1"/>
+          </a:fillRef>
+          <a:effectRef idx="2">
+            <a:schemeClr val="accent1"/>
+          </a:effectRef>
+          <a:fontRef idx="minor">
+            <a:schemeClr val="lt1"/>
+          </a:fontRef>
+        </p:style>
+        <p:txBody>
+          <a:bodyPr rtlCol="0" anchor="ctr" lIns="70000" rIns="70000" tIns="50000" bIns="50000" wrap="square"/>
+          <a:lstStyle/>
+          <a:p>
+            <a:pPr algn="ctr"/>
+            <a:r>
+              <a:rPr b="1" sz="1200">
+                <a:solidFill>
+                  <a:srgbClr val="FFFFFF"/>
+                </a:solidFill>
+                <a:latin typeface="Yu Gothic"/>
+              </a:rPr>
+              <a:t>5 料金の目安</a:t>
+            </a:r>
+          </a:p>
+        </p:txBody>
+      </p:sp>
+      <p:sp>
+        <p:nvSpPr>
+          <p:cNvPr id="48" name="Rectangle 47"/>
+          <p:cNvSpPr/>
+          <p:nvPr/>
+        </p:nvSpPr>
+        <p:spPr>
+          <a:xfrm>
+            <a:off x="325120" y="10363200"/>
+            <a:ext cx="1219200" cy="243840"/>
+          </a:xfrm>
+          <a:prstGeom prst="rect">
+            <a:avLst/>
+          </a:prstGeom>
+          <a:solidFill>
+            <a:srgbClr val="E6F2FF"/>
+          </a:solidFill>
+          <a:ln w="15000">
+            <a:solidFill>
+              <a:srgbClr val="004098"/>
+            </a:solidFill>
+          </a:ln>
+        </p:spPr>
+        <p:style>
+          <a:lnRef idx="1">
+            <a:schemeClr val="accent1"/>
+          </a:lnRef>
+          <a:fillRef idx="3">
+            <a:schemeClr val="accent1"/>
+          </a:fillRef>
+          <a:effectRef idx="2">
+            <a:schemeClr val="accent1"/>
+          </a:effectRef>
+          <a:fontRef idx="minor">
+            <a:schemeClr val="lt1"/>
+          </a:fontRef>
+        </p:style>
+        <p:txBody>
+          <a:bodyPr rtlCol="0" anchor="ctr" lIns="70000" rIns="70000" tIns="50000" bIns="50000" wrap="square"/>
+          <a:lstStyle/>
+          <a:p>
+            <a:pPr algn="ctr"/>
+            <a:r>
+              <a:rPr b="1" sz="900">
+                <a:solidFill>
+                  <a:srgbClr val="003366"/>
+                </a:solidFill>
+                <a:latin typeface="Yu Gothic"/>
+              </a:rPr>
+              <a:t>基本料金</a:t>
+            </a:r>
+          </a:p>
+        </p:txBody>
+      </p:sp>
+      <p:sp>
+        <p:nvSpPr>
+          <p:cNvPr id="49" name="TextBox 48"/>
+          <p:cNvSpPr txBox="1"/>
+          <p:nvPr/>
+        </p:nvSpPr>
+        <p:spPr>
+          <a:xfrm>
+            <a:off x="325120" y="10728960"/>
+            <a:ext cx="1219200" cy="243840"/>
+          </a:xfrm>
+          <a:prstGeom prst="rect">
+            <a:avLst/>
+          </a:prstGeom>
+          <a:noFill/>
+        </p:spPr>
+        <p:txBody>
+          <a:bodyPr wrap="none" lIns="0" rIns="0" tIns="0" bIns="0">
+            <a:spAutoFit/>
+          </a:bodyPr>
+          <a:lstStyle/>
+          <a:p>
+            <a:r>
+              <a:rPr b="0" sz="1000">
+                <a:solidFill>
+                  <a:srgbClr val="333333"/>
+                </a:solidFill>
+                <a:latin typeface="Yu Gothic"/>
+              </a:rPr>
+              <a:t>1ページあたり</a:t>
+            </a:r>
+          </a:p>
+        </p:txBody>
+      </p:sp>
+      <p:sp>
+        <p:nvSpPr>
+          <p:cNvPr id="50" name="TextBox 49"/>
+          <p:cNvSpPr txBox="1"/>
+          <p:nvPr/>
+        </p:nvSpPr>
+        <p:spPr>
+          <a:xfrm>
+            <a:off x="325120" y="10972800"/>
+            <a:ext cx="1219200" cy="487680"/>
+          </a:xfrm>
+          <a:prstGeom prst="rect">
+            <a:avLst/>
+          </a:prstGeom>
+          <a:noFill/>
+        </p:spPr>
+        <p:txBody>
+          <a:bodyPr wrap="none" lIns="0" rIns="0" tIns="0" bIns="0">
+            <a:spAutoFit/>
+          </a:bodyPr>
+          <a:lstStyle/>
+          <a:p>
+            <a:r>
+              <a:rPr b="1" sz="1800">
+                <a:solidFill>
+                  <a:srgbClr val="004098"/>
+                </a:solidFill>
+                <a:latin typeface="Yu Gothic"/>
+              </a:rPr>
+              <a:t>3,000円〜</a:t>
+            </a:r>
+          </a:p>
+        </p:txBody>
+      </p:sp>
+      <p:sp>
+        <p:nvSpPr>
+          <p:cNvPr id="51" name="Rounded Rectangle 50"/>
+          <p:cNvSpPr/>
+          <p:nvPr/>
+        </p:nvSpPr>
+        <p:spPr>
+          <a:xfrm>
+            <a:off x="1706880" y="10363200"/>
+            <a:ext cx="1625600" cy="1219200"/>
+          </a:xfrm>
+          <a:prstGeom prst="roundRect">
+            <a:avLst/>
+          </a:prstGeom>
+          <a:solidFill>
+            <a:srgbClr val="E6F2FF"/>
+          </a:solidFill>
+          <a:ln w="15000">
+            <a:solidFill>
+              <a:srgbClr val="B3D1FF"/>
+            </a:solidFill>
+          </a:ln>
+        </p:spPr>
+        <p:style>
+          <a:lnRef idx="1">
+            <a:schemeClr val="accent1"/>
+          </a:lnRef>
+          <a:fillRef idx="3">
+            <a:schemeClr val="accent1"/>
+          </a:fillRef>
+          <a:effectRef idx="2">
+            <a:schemeClr val="accent1"/>
+          </a:effectRef>
+          <a:fontRef idx="minor">
+            <a:schemeClr val="lt1"/>
+          </a:fontRef>
+        </p:style>
+        <p:txBody>
+          <a:bodyPr rtlCol="0" anchor="ctr"/>
+          <a:lstStyle/>
+          <a:p>
+            <a:pPr algn="ctr"/>
+          </a:p>
+        </p:txBody>
+      </p:sp>
+      <p:sp>
+        <p:nvSpPr>
+          <p:cNvPr id="52" name="TextBox 51"/>
+          <p:cNvSpPr txBox="1"/>
+          <p:nvPr/>
+        </p:nvSpPr>
+        <p:spPr>
+          <a:xfrm>
+            <a:off x="1788160" y="10485120"/>
+            <a:ext cx="1463040" cy="243840"/>
+          </a:xfrm>
+          <a:prstGeom prst="rect">
+            <a:avLst/>
+          </a:prstGeom>
+          <a:noFill/>
+        </p:spPr>
+        <p:txBody>
+          <a:bodyPr wrap="none" lIns="0" rIns="0" tIns="0" bIns="0">
+            <a:spAutoFit/>
+          </a:bodyPr>
+          <a:lstStyle/>
+          <a:p>
+            <a:r>
+              <a:rPr b="1" sz="900">
+                <a:solidFill>
+                  <a:srgbClr val="003366"/>
+                </a:solidFill>
+                <a:latin typeface="Yu Gothic"/>
+              </a:rPr>
+              <a:t>料金は内容により変動します</a:t>
+            </a:r>
+          </a:p>
+        </p:txBody>
+      </p:sp>
+      <p:sp>
+        <p:nvSpPr>
+          <p:cNvPr id="53" name="TextBox 52"/>
+          <p:cNvSpPr txBox="1"/>
+          <p:nvPr/>
+        </p:nvSpPr>
+        <p:spPr>
+          <a:xfrm>
+            <a:off x="1788160" y="10728960"/>
+            <a:ext cx="1463040" cy="731520"/>
+          </a:xfrm>
+          <a:prstGeom prst="rect">
+            <a:avLst/>
+          </a:prstGeom>
+          <a:noFill/>
+        </p:spPr>
+        <p:txBody>
+          <a:bodyPr wrap="none" lIns="0" rIns="0" tIns="0" bIns="0">
+            <a:spAutoFit/>
+          </a:bodyPr>
+          <a:lstStyle/>
+          <a:p>
+            <a:r>
+              <a:rPr b="0" sz="800">
+                <a:solidFill>
+                  <a:srgbClr val="333333"/>
+                </a:solidFill>
+                <a:latin typeface="Yu Gothic"/>
+              </a:rPr>
+              <a:t>・ページ数
+・言語
+・納期
+・レイアウト調整の有無
+・専門用語の量 など</a:t>
+            </a:r>
+          </a:p>
+        </p:txBody>
+      </p:sp>
+      <p:sp>
+        <p:nvSpPr>
+          <p:cNvPr id="54" name="Rounded Rectangle 53"/>
+          <p:cNvSpPr/>
+          <p:nvPr/>
+        </p:nvSpPr>
+        <p:spPr>
+          <a:xfrm>
+            <a:off x="3657600" y="9875520"/>
+            <a:ext cx="4226560" cy="365760"/>
+          </a:xfrm>
+          <a:prstGeom prst="roundRect">
+            <a:avLst/>
+          </a:prstGeom>
+          <a:solidFill>
+            <a:srgbClr val="004098"/>
+          </a:solidFill>
+          <a:ln w="15000">
+            <a:solidFill>
+              <a:srgbClr val="004098"/>
+            </a:solidFill>
+          </a:ln>
+        </p:spPr>
+        <p:style>
+          <a:lnRef idx="1">
+            <a:schemeClr val="accent1"/>
+          </a:lnRef>
+          <a:fillRef idx="3">
+            <a:schemeClr val="accent1"/>
+          </a:fillRef>
+          <a:effectRef idx="2">
+            <a:schemeClr val="accent1"/>
+          </a:effectRef>
+          <a:fontRef idx="minor">
+            <a:schemeClr val="lt1"/>
+          </a:fontRef>
+        </p:style>
+        <p:txBody>
+          <a:bodyPr rtlCol="0" anchor="ctr" lIns="70000" rIns="70000" tIns="50000" bIns="50000" wrap="square"/>
+          <a:lstStyle/>
+          <a:p>
+            <a:pPr algn="ctr"/>
+            <a:r>
+              <a:rPr b="1" sz="1200">
+                <a:solidFill>
+                  <a:srgbClr val="FFFFFF"/>
+                </a:solidFill>
+                <a:latin typeface="Yu Gothic"/>
+              </a:rPr>
+              <a:t>6 当サービスが選ばれる理由</a:t>
+            </a:r>
+          </a:p>
+        </p:txBody>
+      </p:sp>
+      <p:sp>
+        <p:nvSpPr>
+          <p:cNvPr id="55" name="Rounded Rectangle 54"/>
+          <p:cNvSpPr/>
+          <p:nvPr/>
+        </p:nvSpPr>
+        <p:spPr>
+          <a:xfrm>
+            <a:off x="3738880" y="10363200"/>
+            <a:ext cx="1300480" cy="1219200"/>
+          </a:xfrm>
+          <a:prstGeom prst="roundRect">
+            <a:avLst/>
+          </a:prstGeom>
+          <a:solidFill>
+            <a:srgbClr val="FFFFFF"/>
+          </a:solidFill>
+          <a:ln w="15000">
+            <a:solidFill>
+              <a:srgbClr val="E6F2FF"/>
+            </a:solidFill>
+          </a:ln>
+        </p:spPr>
+        <p:style>
+          <a:lnRef idx="1">
+            <a:schemeClr val="accent1"/>
+          </a:lnRef>
+          <a:fillRef idx="3">
+            <a:schemeClr val="accent1"/>
+          </a:fillRef>
+          <a:effectRef idx="2">
+            <a:schemeClr val="accent1"/>
+          </a:effectRef>
+          <a:fontRef idx="minor">
+            <a:schemeClr val="lt1"/>
+          </a:fontRef>
+        </p:style>
+        <p:txBody>
+          <a:bodyPr rtlCol="0" anchor="ctr"/>
+          <a:lstStyle/>
+          <a:p>
+            <a:pPr algn="ctr"/>
+          </a:p>
+        </p:txBody>
+      </p:sp>
+      <p:sp>
+        <p:nvSpPr>
+          <p:cNvPr id="56" name="TextBox 55"/>
+          <p:cNvSpPr txBox="1"/>
+          <p:nvPr/>
+        </p:nvSpPr>
+        <p:spPr>
+          <a:xfrm>
+            <a:off x="3738880" y="10850880"/>
+            <a:ext cx="1300480" cy="243840"/>
+          </a:xfrm>
+          <a:prstGeom prst="rect">
+            <a:avLst/>
+          </a:prstGeom>
+          <a:noFill/>
+        </p:spPr>
+        <p:txBody>
+          <a:bodyPr wrap="none" lIns="0" rIns="0" tIns="0" bIns="0">
+            <a:spAutoFit/>
+          </a:bodyPr>
+          <a:lstStyle/>
+          <a:p>
+            <a:r>
+              <a:rPr b="1" sz="1000">
+                <a:solidFill>
+                  <a:srgbClr val="003366"/>
+                </a:solidFill>
+                <a:latin typeface="Yu Gothic"/>
+              </a:rPr>
+              <a:t>実績と専門性</a:t>
+            </a:r>
+          </a:p>
+        </p:txBody>
+      </p:sp>
+      <p:sp>
+        <p:nvSpPr>
+          <p:cNvPr id="57" name="TextBox 56"/>
+          <p:cNvSpPr txBox="1"/>
+          <p:nvPr/>
+        </p:nvSpPr>
+        <p:spPr>
+          <a:xfrm>
+            <a:off x="3820160" y="11094720"/>
+            <a:ext cx="1137920" cy="487680"/>
+          </a:xfrm>
+          <a:prstGeom prst="rect">
+            <a:avLst/>
+          </a:prstGeom>
+          <a:noFill/>
+        </p:spPr>
+        <p:txBody>
+          <a:bodyPr wrap="none" lIns="0" rIns="0" tIns="0" bIns="0">
+            <a:spAutoFit/>
+          </a:bodyPr>
+          <a:lstStyle/>
+          <a:p>
+            <a:r>
+              <a:rPr b="0" sz="800">
+                <a:solidFill>
+                  <a:srgbClr val="555555"/>
+                </a:solidFill>
+                <a:latin typeface="Yu Gothic"/>
+              </a:rPr>
+              <a:t>マンガ翻訳に特化した豊富な実績とノウハウで高品質を保証します。</a:t>
+            </a:r>
+          </a:p>
+        </p:txBody>
+      </p:sp>
+      <p:sp>
+        <p:nvSpPr>
+          <p:cNvPr id="58" name="Rounded Rectangle 57"/>
+          <p:cNvSpPr/>
+          <p:nvPr/>
+        </p:nvSpPr>
+        <p:spPr>
+          <a:xfrm>
+            <a:off x="5120640" y="10363200"/>
+            <a:ext cx="1300480" cy="1219200"/>
+          </a:xfrm>
+          <a:prstGeom prst="roundRect">
+            <a:avLst/>
+          </a:prstGeom>
+          <a:solidFill>
+            <a:srgbClr val="FFFFFF"/>
+          </a:solidFill>
+          <a:ln w="15000">
+            <a:solidFill>
+              <a:srgbClr val="E6F2FF"/>
+            </a:solidFill>
+          </a:ln>
+        </p:spPr>
+        <p:style>
+          <a:lnRef idx="1">
+            <a:schemeClr val="accent1"/>
+          </a:lnRef>
+          <a:fillRef idx="3">
+            <a:schemeClr val="accent1"/>
+          </a:fillRef>
+          <a:effectRef idx="2">
+            <a:schemeClr val="accent1"/>
+          </a:effectRef>
+          <a:fontRef idx="minor">
+            <a:schemeClr val="lt1"/>
+          </a:fontRef>
+        </p:style>
+        <p:txBody>
+          <a:bodyPr rtlCol="0" anchor="ctr"/>
+          <a:lstStyle/>
+          <a:p>
+            <a:pPr algn="ctr"/>
+          </a:p>
+        </p:txBody>
+      </p:sp>
+      <p:sp>
+        <p:nvSpPr>
+          <p:cNvPr id="59" name="TextBox 58"/>
+          <p:cNvSpPr txBox="1"/>
+          <p:nvPr/>
+        </p:nvSpPr>
+        <p:spPr>
+          <a:xfrm>
+            <a:off x="5120640" y="10850880"/>
+            <a:ext cx="1300480" cy="243840"/>
+          </a:xfrm>
+          <a:prstGeom prst="rect">
+            <a:avLst/>
+          </a:prstGeom>
+          <a:noFill/>
+        </p:spPr>
+        <p:txBody>
+          <a:bodyPr wrap="none" lIns="0" rIns="0" tIns="0" bIns="0">
+            <a:spAutoFit/>
+          </a:bodyPr>
+          <a:lstStyle/>
+          <a:p>
+            <a:r>
+              <a:rPr b="1" sz="1000">
+                <a:solidFill>
+                  <a:srgbClr val="003366"/>
+                </a:solidFill>
+                <a:latin typeface="Yu Gothic"/>
+              </a:rPr>
+              <a:t>丁寧なコミュニケーション</a:t>
+            </a:r>
+          </a:p>
+        </p:txBody>
+      </p:sp>
+      <p:sp>
+        <p:nvSpPr>
+          <p:cNvPr id="60" name="TextBox 59"/>
+          <p:cNvSpPr txBox="1"/>
+          <p:nvPr/>
+        </p:nvSpPr>
+        <p:spPr>
+          <a:xfrm>
+            <a:off x="5201920" y="11094720"/>
+            <a:ext cx="1137920" cy="487680"/>
+          </a:xfrm>
+          <a:prstGeom prst="rect">
+            <a:avLst/>
+          </a:prstGeom>
+          <a:noFill/>
+        </p:spPr>
+        <p:txBody>
+          <a:bodyPr wrap="none" lIns="0" rIns="0" tIns="0" bIns="0">
+            <a:spAutoFit/>
+          </a:bodyPr>
+          <a:lstStyle/>
+          <a:p>
+            <a:r>
+              <a:rPr b="0" sz="800">
+                <a:solidFill>
+                  <a:srgbClr val="555555"/>
+                </a:solidFill>
+                <a:latin typeface="Yu Gothic"/>
+              </a:rPr>
+              <a:t>進捗報告をこまめに行い、ご要望に柔軟に対応いたします。</a:t>
+            </a:r>
+          </a:p>
+        </p:txBody>
+      </p:sp>
+      <p:sp>
+        <p:nvSpPr>
+          <p:cNvPr id="61" name="Rounded Rectangle 60"/>
+          <p:cNvSpPr/>
+          <p:nvPr/>
+        </p:nvSpPr>
+        <p:spPr>
+          <a:xfrm>
+            <a:off x="6502400" y="10363200"/>
+            <a:ext cx="1300480" cy="1219200"/>
+          </a:xfrm>
+          <a:prstGeom prst="roundRect">
+            <a:avLst/>
+          </a:prstGeom>
+          <a:solidFill>
+            <a:srgbClr val="FFFFFF"/>
+          </a:solidFill>
+          <a:ln w="15000">
+            <a:solidFill>
+              <a:srgbClr val="E6F2FF"/>
+            </a:solidFill>
+          </a:ln>
+        </p:spPr>
+        <p:style>
+          <a:lnRef idx="1">
+            <a:schemeClr val="accent1"/>
+          </a:lnRef>
+          <a:fillRef idx="3">
+            <a:schemeClr val="accent1"/>
+          </a:fillRef>
+          <a:effectRef idx="2">
+            <a:schemeClr val="accent1"/>
+          </a:effectRef>
+          <a:fontRef idx="minor">
+            <a:schemeClr val="lt1"/>
+          </a:fontRef>
+        </p:style>
+        <p:txBody>
+          <a:bodyPr rtlCol="0" anchor="ctr"/>
+          <a:lstStyle/>
+          <a:p>
+            <a:pPr algn="ctr"/>
+          </a:p>
+        </p:txBody>
+      </p:sp>
+      <p:sp>
+        <p:nvSpPr>
+          <p:cNvPr id="62" name="TextBox 61"/>
+          <p:cNvSpPr txBox="1"/>
+          <p:nvPr/>
+        </p:nvSpPr>
+        <p:spPr>
+          <a:xfrm>
+            <a:off x="6502400" y="10850880"/>
+            <a:ext cx="1300480" cy="243840"/>
+          </a:xfrm>
+          <a:prstGeom prst="rect">
+            <a:avLst/>
+          </a:prstGeom>
+          <a:noFill/>
+        </p:spPr>
+        <p:txBody>
+          <a:bodyPr wrap="none" lIns="0" rIns="0" tIns="0" bIns="0">
+            <a:spAutoFit/>
+          </a:bodyPr>
+          <a:lstStyle/>
+          <a:p>
+            <a:r>
+              <a:rPr b="1" sz="1000">
+                <a:solidFill>
+                  <a:srgbClr val="003366"/>
+                </a:solidFill>
+                <a:latin typeface="Yu Gothic"/>
+              </a:rPr>
+              <a:t>作品へのリスペクト</a:t>
+            </a:r>
+          </a:p>
+        </p:txBody>
+      </p:sp>
+      <p:sp>
+        <p:nvSpPr>
+          <p:cNvPr id="63" name="TextBox 62"/>
+          <p:cNvSpPr txBox="1"/>
+          <p:nvPr/>
+        </p:nvSpPr>
+        <p:spPr>
+          <a:xfrm>
+            <a:off x="6583680" y="11094720"/>
+            <a:ext cx="1137920" cy="487680"/>
+          </a:xfrm>
+          <a:prstGeom prst="rect">
+            <a:avLst/>
+          </a:prstGeom>
+          <a:noFill/>
+        </p:spPr>
+        <p:txBody>
+          <a:bodyPr wrap="none" lIns="0" rIns="0" tIns="0" bIns="0">
+            <a:spAutoFit/>
+          </a:bodyPr>
+          <a:lstStyle/>
+          <a:p>
+            <a:r>
+              <a:rPr b="0" sz="800">
+                <a:solidFill>
+                  <a:srgbClr val="555555"/>
+                </a:solidFill>
+                <a:latin typeface="Yu Gothic"/>
+              </a:rPr>
+              <a:t>作品の魅力を最大限に引き出す翻訳を心がけ、ファンに届く翻訳を提供します。</a:t>
+            </a:r>
+          </a:p>
+        </p:txBody>
+      </p:sp>
+      <p:sp>
+        <p:nvSpPr>
+          <p:cNvPr id="64" name="Rectangle 63"/>
+          <p:cNvSpPr/>
+          <p:nvPr/>
+        </p:nvSpPr>
+        <p:spPr>
+          <a:xfrm>
+            <a:off x="0" y="11582400"/>
+            <a:ext cx="8128000" cy="609600"/>
+          </a:xfrm>
+          <a:prstGeom prst="rect">
+            <a:avLst/>
+          </a:prstGeom>
+          <a:solidFill>
+            <a:srgbClr val="003366"/>
+          </a:solidFill>
+          <a:ln w="15000">
+            <a:solidFill>
+              <a:srgbClr val="004098"/>
+            </a:solidFill>
+          </a:ln>
+        </p:spPr>
+        <p:style>
+          <a:lnRef idx="1">
+            <a:schemeClr val="accent1"/>
+          </a:lnRef>
+          <a:fillRef idx="3">
+            <a:schemeClr val="accent1"/>
+          </a:fillRef>
+          <a:effectRef idx="2">
+            <a:schemeClr val="accent1"/>
+          </a:effectRef>
+          <a:fontRef idx="minor">
+            <a:schemeClr val="lt1"/>
+          </a:fontRef>
+        </p:style>
+        <p:txBody>
+          <a:bodyPr rtlCol="0" anchor="ctr"/>
+          <a:lstStyle/>
+          <a:p>
+            <a:pPr algn="ctr"/>
+          </a:p>
+        </p:txBody>
+      </p:sp>
+      <p:sp>
+        <p:nvSpPr>
+          <p:cNvPr id="65" name="TextBox 64"/>
+          <p:cNvSpPr txBox="1"/>
+          <p:nvPr/>
+        </p:nvSpPr>
+        <p:spPr>
+          <a:xfrm>
+            <a:off x="650240" y="11704320"/>
+            <a:ext cx="1219200" cy="243840"/>
+          </a:xfrm>
+          <a:prstGeom prst="rect">
+            <a:avLst/>
+          </a:prstGeom>
+          <a:noFill/>
+        </p:spPr>
+        <p:txBody>
+          <a:bodyPr wrap="none" lIns="0" rIns="0" tIns="0" bIns="0">
+            <a:spAutoFit/>
+          </a:bodyPr>
+          <a:lstStyle/>
+          <a:p>
+            <a:r>
+              <a:rPr b="1" sz="1100">
+                <a:solidFill>
+                  <a:srgbClr val="FFFFFF"/>
+                </a:solidFill>
+                <a:latin typeface="Yu Gothic"/>
+              </a:rPr>
+              <a:t>お問い合わせ</a:t>
+            </a:r>
+          </a:p>
+        </p:txBody>
+      </p:sp>
+      <p:sp>
+        <p:nvSpPr>
+          <p:cNvPr id="66" name="TextBox 65"/>
+          <p:cNvSpPr txBox="1"/>
+          <p:nvPr/>
+        </p:nvSpPr>
+        <p:spPr>
+          <a:xfrm>
+            <a:off x="650240" y="11948160"/>
+            <a:ext cx="2844800" cy="243840"/>
+          </a:xfrm>
+          <a:prstGeom prst="rect">
+            <a:avLst/>
+          </a:prstGeom>
+          <a:noFill/>
+        </p:spPr>
+        <p:txBody>
+          <a:bodyPr wrap="none" lIns="0" rIns="0" tIns="0" bIns="0">
+            <a:spAutoFit/>
+          </a:bodyPr>
+          <a:lstStyle/>
+          <a:p>
+            <a:r>
+              <a:rPr b="0" sz="800">
+                <a:solidFill>
+                  <a:srgbClr val="FFFFFF"/>
+                </a:solidFill>
+                <a:latin typeface="Yu Gothic"/>
+              </a:rPr>
+              <a:t>ご相談・お見積りは無料です。まずはお気軽にご連絡ください。</a:t>
+            </a:r>
+          </a:p>
+        </p:txBody>
+      </p:sp>
+      <p:sp>
+        <p:nvSpPr>
+          <p:cNvPr id="67" name="TextBox 66"/>
+          <p:cNvSpPr txBox="1"/>
+          <p:nvPr/>
+        </p:nvSpPr>
+        <p:spPr>
+          <a:xfrm>
+            <a:off x="4714240" y="11704320"/>
+            <a:ext cx="1219200" cy="243840"/>
+          </a:xfrm>
+          <a:prstGeom prst="rect">
+            <a:avLst/>
+          </a:prstGeom>
+          <a:noFill/>
+        </p:spPr>
+        <p:txBody>
+          <a:bodyPr wrap="none" lIns="0" rIns="0" tIns="0" bIns="0">
+            <a:spAutoFit/>
+          </a:bodyPr>
+          <a:lstStyle/>
+          <a:p>
+            <a:r>
+              <a:rPr b="1" sz="1100">
+                <a:solidFill>
+                  <a:srgbClr val="FFFFFF"/>
+                </a:solidFill>
+                <a:latin typeface="Aptos"/>
+              </a:rPr>
+              <a:t>00-0000-0000</a:t>
+            </a:r>
+          </a:p>
+        </p:txBody>
+      </p:sp>
+      <p:sp>
+        <p:nvSpPr>
+          <p:cNvPr id="68" name="TextBox 67"/>
+          <p:cNvSpPr txBox="1"/>
+          <p:nvPr/>
+        </p:nvSpPr>
+        <p:spPr>
+          <a:xfrm>
+            <a:off x="4714240" y="11948160"/>
+            <a:ext cx="1219200" cy="243840"/>
+          </a:xfrm>
+          <a:prstGeom prst="rect">
+            <a:avLst/>
+          </a:prstGeom>
+          <a:noFill/>
+        </p:spPr>
+        <p:txBody>
+          <a:bodyPr wrap="none" lIns="0" rIns="0" tIns="0" bIns="0">
+            <a:spAutoFit/>
+          </a:bodyPr>
+          <a:lstStyle/>
+          <a:p>
+            <a:r>
+              <a:rPr b="0" sz="900">
+                <a:solidFill>
+                  <a:srgbClr val="FFFFFF"/>
+                </a:solidFill>
+                <a:latin typeface="Aptos"/>
+              </a:rPr>
+              <a:t>info@example.com</a:t>
+            </a:r>
+          </a:p>
+        </p:txBody>
+      </p:sp>
+      <p:sp>
+        <p:nvSpPr>
+          <p:cNvPr id="69" name="TextBox 68"/>
+          <p:cNvSpPr txBox="1"/>
+          <p:nvPr/>
+        </p:nvSpPr>
+        <p:spPr>
+          <a:xfrm>
+            <a:off x="6664960" y="11704320"/>
+            <a:ext cx="1219200" cy="243840"/>
+          </a:xfrm>
+          <a:prstGeom prst="rect">
+            <a:avLst/>
+          </a:prstGeom>
+          <a:noFill/>
+        </p:spPr>
+        <p:txBody>
+          <a:bodyPr wrap="none" lIns="0" rIns="0" tIns="0" bIns="0">
+            <a:spAutoFit/>
+          </a:bodyPr>
+          <a:lstStyle/>
+          <a:p>
+            <a:r>
+              <a:rPr b="1" sz="1000">
+                <a:solidFill>
+                  <a:srgbClr val="FFFFFF"/>
+                </a:solidFill>
+                <a:latin typeface="Yu Gothic"/>
+              </a:rPr>
+              <a:t>会社名・サービス名</a:t>
+            </a:r>
+          </a:p>
+        </p:txBody>
+      </p:sp>
+      <p:sp>
+        <p:nvSpPr>
+          <p:cNvPr id="70" name="TextBox 69"/>
+          <p:cNvSpPr txBox="1"/>
+          <p:nvPr/>
+        </p:nvSpPr>
+        <p:spPr>
+          <a:xfrm>
+            <a:off x="6664960" y="11948160"/>
+            <a:ext cx="1219200" cy="243840"/>
+          </a:xfrm>
+          <a:prstGeom prst="rect">
+            <a:avLst/>
+          </a:prstGeom>
+          <a:noFill/>
+        </p:spPr>
+        <p:txBody>
+          <a:bodyPr wrap="none" lIns="0" rIns="0" tIns="0" bIns="0">
+            <a:spAutoFit/>
+          </a:bodyPr>
+          <a:lstStyle/>
+          <a:p>
+            <a:r>
+              <a:rPr b="0" sz="800">
+                <a:solidFill>
+                  <a:srgbClr val="FFFFFF"/>
+                </a:solidFill>
+                <a:latin typeface="Yu Gothic"/>
+              </a:rPr>
+              <a:t>担当：〇〇 〇〇</a:t>
+            </a:r>
+          </a:p>
+        </p:txBody>
+      </p:sp>
       <p:pic>
         <p:nvPicPr>
-          <p:cNvPr id="2" name="Picture 1" descr="region-1.png"/>
+          <p:cNvPr id="71" name="Picture 70" descr="region-0.png"/>
           <p:cNvPicPr>
             <a:picLocks noChangeAspect="1"/>
           </p:cNvPicPr>
@@ -3112,8 +5892,8 @@
         </p:blipFill>
         <p:spPr>
           <a:xfrm>
-            <a:off x="3901440" y="4511040"/>
-            <a:ext cx="4064000" cy="3048000"/>
+            <a:off x="5283200" y="0"/>
+            <a:ext cx="2844800" cy="2438400"/>
           </a:xfrm>
           <a:prstGeom prst="rect">
             <a:avLst/>
@@ -3122,7 +5902,7 @@
       </p:pic>
       <p:pic>
         <p:nvPicPr>
-          <p:cNvPr id="3" name="Picture 2" descr="region-4.png"/>
+          <p:cNvPr id="72" name="Picture 71" descr="region-1.png"/>
           <p:cNvPicPr>
             <a:picLocks noChangeAspect="1"/>
           </p:cNvPicPr>
@@ -3136,1930 +5916,8 @@
         </p:blipFill>
         <p:spPr>
           <a:xfrm>
-            <a:off x="0" y="11460480"/>
-            <a:ext cx="8128000" cy="731520"/>
-          </a:xfrm>
-          <a:prstGeom prst="rect">
-            <a:avLst/>
-          </a:prstGeom>
-        </p:spPr>
-      </p:pic>
-      <p:sp>
-        <p:nvSpPr>
-          <p:cNvPr id="4" name="TextBox 3"/>
-          <p:cNvSpPr txBox="1"/>
-          <p:nvPr/>
-        </p:nvSpPr>
-        <p:spPr>
-          <a:xfrm>
-            <a:off x="162560" y="243840"/>
-            <a:ext cx="3657600" cy="609600"/>
-          </a:xfrm>
-          <a:prstGeom prst="rect">
-            <a:avLst/>
-          </a:prstGeom>
-          <a:noFill/>
-        </p:spPr>
-        <p:txBody>
-          <a:bodyPr wrap="none" lIns="0" rIns="0" tIns="0" bIns="0">
-            <a:spAutoFit/>
-          </a:bodyPr>
-          <a:lstStyle/>
-          <a:p>
-            <a:r>
-              <a:rPr b="1" sz="2800">
-                <a:solidFill>
-                  <a:srgbClr val="0B305F"/>
-                </a:solidFill>
-                <a:latin typeface="Yu Gothic"/>
-              </a:rPr>
-              <a:t>会社の強みを、</a:t>
-            </a:r>
-          </a:p>
-        </p:txBody>
-      </p:sp>
-      <p:sp>
-        <p:nvSpPr>
-          <p:cNvPr id="5" name="TextBox 4"/>
-          <p:cNvSpPr txBox="1"/>
-          <p:nvPr/>
-        </p:nvSpPr>
-        <p:spPr>
-          <a:xfrm>
-            <a:off x="162560" y="853440"/>
-            <a:ext cx="3657600" cy="609600"/>
-          </a:xfrm>
-          <a:prstGeom prst="rect">
-            <a:avLst/>
-          </a:prstGeom>
-          <a:noFill/>
-        </p:spPr>
-        <p:txBody>
-          <a:bodyPr wrap="none" lIns="0" rIns="0" tIns="0" bIns="0">
-            <a:spAutoFit/>
-          </a:bodyPr>
-          <a:lstStyle/>
-          <a:p>
-            <a:r>
-              <a:rPr b="1" sz="2800">
-                <a:solidFill>
-                  <a:srgbClr val="0B305F"/>
-                </a:solidFill>
-                <a:latin typeface="Yu Gothic"/>
-              </a:rPr>
-              <a:t>問い合わせにつながる</a:t>
-            </a:r>
-          </a:p>
-        </p:txBody>
-      </p:sp>
-      <p:sp>
-        <p:nvSpPr>
-          <p:cNvPr id="6" name="TextBox 5"/>
-          <p:cNvSpPr txBox="1"/>
-          <p:nvPr/>
-        </p:nvSpPr>
-        <p:spPr>
-          <a:xfrm>
-            <a:off x="162560" y="1463040"/>
-            <a:ext cx="3657600" cy="731520"/>
-          </a:xfrm>
-          <a:prstGeom prst="rect">
-            <a:avLst/>
-          </a:prstGeom>
-          <a:noFill/>
-        </p:spPr>
-        <p:txBody>
-          <a:bodyPr wrap="none" lIns="0" rIns="0" tIns="0" bIns="0">
-            <a:spAutoFit/>
-          </a:bodyPr>
-          <a:lstStyle/>
-          <a:p>
-            <a:r>
-              <a:rPr b="1" sz="3600">
-                <a:solidFill>
-                  <a:srgbClr val="B89030"/>
-                </a:solidFill>
-                <a:latin typeface="Yu Gothic"/>
-              </a:rPr>
-              <a:t>AI対応LPへ。</a:t>
-            </a:r>
-          </a:p>
-        </p:txBody>
-      </p:sp>
-      <p:sp>
-        <p:nvSpPr>
-          <p:cNvPr id="7" name="TextBox 6"/>
-          <p:cNvSpPr txBox="1"/>
-          <p:nvPr/>
-        </p:nvSpPr>
-        <p:spPr>
-          <a:xfrm>
-            <a:off x="162560" y="2194560"/>
-            <a:ext cx="3413760" cy="975360"/>
-          </a:xfrm>
-          <a:prstGeom prst="rect">
-            <a:avLst/>
-          </a:prstGeom>
-          <a:noFill/>
-        </p:spPr>
-        <p:txBody>
-          <a:bodyPr wrap="none" lIns="0" rIns="0" tIns="0" bIns="0">
-            <a:spAutoFit/>
-          </a:bodyPr>
-          <a:lstStyle/>
-          <a:p>
-            <a:r>
-              <a:rPr b="0" sz="1200">
-                <a:solidFill>
-                  <a:srgbClr val="333333"/>
-                </a:solidFill>
-                <a:latin typeface="Yu Gothic"/>
-              </a:rPr>
-              <a:t>事業内容・サービス・顧客課題・強みをもとに、
-AIが専用デザインカンプを作成。
-テンプレートではなく、商談獲得を目的にした
-BtoB向けLPを個別に設計します。</a:t>
-            </a:r>
-          </a:p>
-        </p:txBody>
-      </p:sp>
-      <p:sp>
-        <p:nvSpPr>
-          <p:cNvPr id="8" name="Rounded Rectangle 7"/>
-          <p:cNvSpPr/>
-          <p:nvPr/>
-        </p:nvSpPr>
-        <p:spPr>
-          <a:xfrm>
-            <a:off x="162560" y="3291840"/>
-            <a:ext cx="812800" cy="975360"/>
-          </a:xfrm>
-          <a:prstGeom prst="roundRect">
-            <a:avLst/>
-          </a:prstGeom>
-          <a:solidFill>
-            <a:srgbClr val="FFFFFF"/>
-          </a:solidFill>
-          <a:ln w="15000">
-            <a:solidFill>
-              <a:srgbClr val="E0E0E0"/>
-            </a:solidFill>
-          </a:ln>
-        </p:spPr>
-        <p:style>
-          <a:lnRef idx="1">
-            <a:schemeClr val="accent1"/>
-          </a:lnRef>
-          <a:fillRef idx="3">
-            <a:schemeClr val="accent1"/>
-          </a:fillRef>
-          <a:effectRef idx="2">
-            <a:schemeClr val="accent1"/>
-          </a:effectRef>
-          <a:fontRef idx="minor">
-            <a:schemeClr val="lt1"/>
-          </a:fontRef>
-        </p:style>
-        <p:txBody>
-          <a:bodyPr rtlCol="0" anchor="ctr"/>
-          <a:lstStyle/>
-          <a:p>
-            <a:pPr algn="ctr"/>
-          </a:p>
-        </p:txBody>
-      </p:sp>
-      <p:sp>
-        <p:nvSpPr>
-          <p:cNvPr id="9" name="TextBox 8"/>
-          <p:cNvSpPr txBox="1"/>
-          <p:nvPr/>
-        </p:nvSpPr>
-        <p:spPr>
-          <a:xfrm>
-            <a:off x="162560" y="3779520"/>
-            <a:ext cx="812800" cy="487680"/>
-          </a:xfrm>
-          <a:prstGeom prst="rect">
-            <a:avLst/>
-          </a:prstGeom>
-          <a:noFill/>
-        </p:spPr>
-        <p:txBody>
-          <a:bodyPr wrap="none" lIns="0" rIns="0" tIns="0" bIns="0">
-            <a:spAutoFit/>
-          </a:bodyPr>
-          <a:lstStyle/>
-          <a:p>
-            <a:r>
-              <a:rPr b="1" sz="1000">
-                <a:solidFill>
-                  <a:srgbClr val="333333"/>
-                </a:solidFill>
-                <a:latin typeface="Yu Gothic"/>
-              </a:rPr>
-              <a:t>商談獲得に
-特化</a:t>
-            </a:r>
-          </a:p>
-        </p:txBody>
-      </p:sp>
-      <p:sp>
-        <p:nvSpPr>
-          <p:cNvPr id="10" name="Rounded Rectangle 9"/>
-          <p:cNvSpPr/>
-          <p:nvPr/>
-        </p:nvSpPr>
-        <p:spPr>
-          <a:xfrm>
-            <a:off x="1056640" y="3291840"/>
-            <a:ext cx="812800" cy="975360"/>
-          </a:xfrm>
-          <a:prstGeom prst="roundRect">
-            <a:avLst/>
-          </a:prstGeom>
-          <a:solidFill>
-            <a:srgbClr val="FFFFFF"/>
-          </a:solidFill>
-          <a:ln w="15000">
-            <a:solidFill>
-              <a:srgbClr val="E0E0E0"/>
-            </a:solidFill>
-          </a:ln>
-        </p:spPr>
-        <p:style>
-          <a:lnRef idx="1">
-            <a:schemeClr val="accent1"/>
-          </a:lnRef>
-          <a:fillRef idx="3">
-            <a:schemeClr val="accent1"/>
-          </a:fillRef>
-          <a:effectRef idx="2">
-            <a:schemeClr val="accent1"/>
-          </a:effectRef>
-          <a:fontRef idx="minor">
-            <a:schemeClr val="lt1"/>
-          </a:fontRef>
-        </p:style>
-        <p:txBody>
-          <a:bodyPr rtlCol="0" anchor="ctr"/>
-          <a:lstStyle/>
-          <a:p>
-            <a:pPr algn="ctr"/>
-          </a:p>
-        </p:txBody>
-      </p:sp>
-      <p:sp>
-        <p:nvSpPr>
-          <p:cNvPr id="11" name="TextBox 10"/>
-          <p:cNvSpPr txBox="1"/>
-          <p:nvPr/>
-        </p:nvSpPr>
-        <p:spPr>
-          <a:xfrm>
-            <a:off x="1056640" y="3779520"/>
-            <a:ext cx="812800" cy="487680"/>
-          </a:xfrm>
-          <a:prstGeom prst="rect">
-            <a:avLst/>
-          </a:prstGeom>
-          <a:noFill/>
-        </p:spPr>
-        <p:txBody>
-          <a:bodyPr wrap="none" lIns="0" rIns="0" tIns="0" bIns="0">
-            <a:spAutoFit/>
-          </a:bodyPr>
-          <a:lstStyle/>
-          <a:p>
-            <a:r>
-              <a:rPr b="1" sz="1000">
-                <a:solidFill>
-                  <a:srgbClr val="333333"/>
-                </a:solidFill>
-                <a:latin typeface="Yu Gothic"/>
-              </a:rPr>
-              <a:t>AI検索に
-強い構造</a:t>
-            </a:r>
-          </a:p>
-        </p:txBody>
-      </p:sp>
-      <p:sp>
-        <p:nvSpPr>
-          <p:cNvPr id="12" name="Rounded Rectangle 11"/>
-          <p:cNvSpPr/>
-          <p:nvPr/>
-        </p:nvSpPr>
-        <p:spPr>
-          <a:xfrm>
-            <a:off x="1950720" y="3291840"/>
-            <a:ext cx="812800" cy="975360"/>
-          </a:xfrm>
-          <a:prstGeom prst="roundRect">
-            <a:avLst/>
-          </a:prstGeom>
-          <a:solidFill>
-            <a:srgbClr val="FFFFFF"/>
-          </a:solidFill>
-          <a:ln w="15000">
-            <a:solidFill>
-              <a:srgbClr val="E0E0E0"/>
-            </a:solidFill>
-          </a:ln>
-        </p:spPr>
-        <p:style>
-          <a:lnRef idx="1">
-            <a:schemeClr val="accent1"/>
-          </a:lnRef>
-          <a:fillRef idx="3">
-            <a:schemeClr val="accent1"/>
-          </a:fillRef>
-          <a:effectRef idx="2">
-            <a:schemeClr val="accent1"/>
-          </a:effectRef>
-          <a:fontRef idx="minor">
-            <a:schemeClr val="lt1"/>
-          </a:fontRef>
-        </p:style>
-        <p:txBody>
-          <a:bodyPr rtlCol="0" anchor="ctr"/>
-          <a:lstStyle/>
-          <a:p>
-            <a:pPr algn="ctr"/>
-          </a:p>
-        </p:txBody>
-      </p:sp>
-      <p:sp>
-        <p:nvSpPr>
-          <p:cNvPr id="13" name="TextBox 12"/>
-          <p:cNvSpPr txBox="1"/>
-          <p:nvPr/>
-        </p:nvSpPr>
-        <p:spPr>
-          <a:xfrm>
-            <a:off x="1950720" y="3779520"/>
-            <a:ext cx="812800" cy="487680"/>
-          </a:xfrm>
-          <a:prstGeom prst="rect">
-            <a:avLst/>
-          </a:prstGeom>
-          <a:noFill/>
-        </p:spPr>
-        <p:txBody>
-          <a:bodyPr wrap="none" lIns="0" rIns="0" tIns="0" bIns="0">
-            <a:spAutoFit/>
-          </a:bodyPr>
-          <a:lstStyle/>
-          <a:p>
-            <a:r>
-              <a:rPr b="1" sz="1000">
-                <a:solidFill>
-                  <a:srgbClr val="333333"/>
-                </a:solidFill>
-                <a:latin typeface="Yu Gothic"/>
-              </a:rPr>
-              <a:t>事業の強みを
-最適に伝える</a:t>
-            </a:r>
-          </a:p>
-        </p:txBody>
-      </p:sp>
-      <p:sp>
-        <p:nvSpPr>
-          <p:cNvPr id="14" name="Rounded Rectangle 13"/>
-          <p:cNvSpPr/>
-          <p:nvPr/>
-        </p:nvSpPr>
-        <p:spPr>
-          <a:xfrm>
-            <a:off x="2844800" y="3291840"/>
-            <a:ext cx="812800" cy="975360"/>
-          </a:xfrm>
-          <a:prstGeom prst="roundRect">
-            <a:avLst/>
-          </a:prstGeom>
-          <a:solidFill>
-            <a:srgbClr val="FFFFFF"/>
-          </a:solidFill>
-          <a:ln w="15000">
-            <a:solidFill>
-              <a:srgbClr val="E0E0E0"/>
-            </a:solidFill>
-          </a:ln>
-        </p:spPr>
-        <p:style>
-          <a:lnRef idx="1">
-            <a:schemeClr val="accent1"/>
-          </a:lnRef>
-          <a:fillRef idx="3">
-            <a:schemeClr val="accent1"/>
-          </a:fillRef>
-          <a:effectRef idx="2">
-            <a:schemeClr val="accent1"/>
-          </a:effectRef>
-          <a:fontRef idx="minor">
-            <a:schemeClr val="lt1"/>
-          </a:fontRef>
-        </p:style>
-        <p:txBody>
-          <a:bodyPr rtlCol="0" anchor="ctr"/>
-          <a:lstStyle/>
-          <a:p>
-            <a:pPr algn="ctr"/>
-          </a:p>
-        </p:txBody>
-      </p:sp>
-      <p:sp>
-        <p:nvSpPr>
-          <p:cNvPr id="15" name="TextBox 14"/>
-          <p:cNvSpPr txBox="1"/>
-          <p:nvPr/>
-        </p:nvSpPr>
-        <p:spPr>
-          <a:xfrm>
-            <a:off x="2844800" y="3779520"/>
-            <a:ext cx="812800" cy="487680"/>
-          </a:xfrm>
-          <a:prstGeom prst="rect">
-            <a:avLst/>
-          </a:prstGeom>
-          <a:noFill/>
-        </p:spPr>
-        <p:txBody>
-          <a:bodyPr wrap="none" lIns="0" rIns="0" tIns="0" bIns="0">
-            <a:spAutoFit/>
-          </a:bodyPr>
-          <a:lstStyle/>
-          <a:p>
-            <a:r>
-              <a:rPr b="1" sz="1000">
-                <a:solidFill>
-                  <a:srgbClr val="333333"/>
-                </a:solidFill>
-                <a:latin typeface="Yu Gothic"/>
-              </a:rPr>
-              <a:t>安心・安全の
-運用体制</a:t>
-            </a:r>
-          </a:p>
-        </p:txBody>
-      </p:sp>
-      <p:sp>
-        <p:nvSpPr>
-          <p:cNvPr id="16" name="Rounded Rectangle 15"/>
-          <p:cNvSpPr/>
-          <p:nvPr/>
-        </p:nvSpPr>
-        <p:spPr>
-          <a:xfrm>
-            <a:off x="162560" y="4511040"/>
-            <a:ext cx="3576320" cy="365760"/>
-          </a:xfrm>
-          <a:prstGeom prst="roundRect">
-            <a:avLst/>
-          </a:prstGeom>
-          <a:solidFill>
-            <a:srgbClr val="0B305F"/>
-          </a:solidFill>
-          <a:ln w="15000">
-            <a:solidFill>
-              <a:srgbClr val="0B305F"/>
-            </a:solidFill>
-          </a:ln>
-        </p:spPr>
-        <p:style>
-          <a:lnRef idx="1">
-            <a:schemeClr val="accent1"/>
-          </a:lnRef>
-          <a:fillRef idx="3">
-            <a:schemeClr val="accent1"/>
-          </a:fillRef>
-          <a:effectRef idx="2">
-            <a:schemeClr val="accent1"/>
-          </a:effectRef>
-          <a:fontRef idx="minor">
-            <a:schemeClr val="lt1"/>
-          </a:fontRef>
-        </p:style>
-        <p:txBody>
-          <a:bodyPr rtlCol="0" anchor="ctr"/>
-          <a:lstStyle/>
-          <a:p>
-            <a:pPr algn="ctr"/>
-          </a:p>
-        </p:txBody>
-      </p:sp>
-      <p:sp>
-        <p:nvSpPr>
-          <p:cNvPr id="17" name="TextBox 16"/>
-          <p:cNvSpPr txBox="1"/>
-          <p:nvPr/>
-        </p:nvSpPr>
-        <p:spPr>
-          <a:xfrm>
-            <a:off x="162560" y="4511040"/>
-            <a:ext cx="3576320" cy="365760"/>
-          </a:xfrm>
-          <a:prstGeom prst="rect">
-            <a:avLst/>
-          </a:prstGeom>
-          <a:noFill/>
-        </p:spPr>
-        <p:txBody>
-          <a:bodyPr wrap="none" lIns="0" rIns="0" tIns="0" bIns="0">
-            <a:spAutoFit/>
-          </a:bodyPr>
-          <a:lstStyle/>
-          <a:p>
-            <a:r>
-              <a:rPr b="1" sz="1200">
-                <a:solidFill>
-                  <a:srgbClr val="FFFFFF"/>
-                </a:solidFill>
-                <a:latin typeface="Yu Gothic"/>
-              </a:rPr>
-              <a:t>AEO＋LP 作成サービスの強み</a:t>
-            </a:r>
-          </a:p>
-        </p:txBody>
-      </p:sp>
-      <p:sp>
-        <p:nvSpPr>
-          <p:cNvPr id="18" name="TextBox 17"/>
-          <p:cNvSpPr txBox="1"/>
-          <p:nvPr/>
-        </p:nvSpPr>
-        <p:spPr>
-          <a:xfrm>
-            <a:off x="325120" y="4998720"/>
-            <a:ext cx="3251200" cy="243840"/>
-          </a:xfrm>
-          <a:prstGeom prst="rect">
-            <a:avLst/>
-          </a:prstGeom>
-          <a:noFill/>
-        </p:spPr>
-        <p:txBody>
-          <a:bodyPr wrap="none" lIns="0" rIns="0" tIns="0" bIns="0">
-            <a:spAutoFit/>
-          </a:bodyPr>
-          <a:lstStyle/>
-          <a:p>
-            <a:r>
-              <a:rPr b="1" sz="1100">
-                <a:solidFill>
-                  <a:srgbClr val="333333"/>
-                </a:solidFill>
-                <a:latin typeface="Yu Gothic"/>
-              </a:rPr>
-              <a:t>・会社ごとに専用デザインカンプを作成</a:t>
-            </a:r>
-          </a:p>
-        </p:txBody>
-      </p:sp>
-      <p:sp>
-        <p:nvSpPr>
-          <p:cNvPr id="19" name="TextBox 18"/>
-          <p:cNvSpPr txBox="1"/>
-          <p:nvPr/>
-        </p:nvSpPr>
-        <p:spPr>
-          <a:xfrm>
-            <a:off x="325120" y="5364480"/>
-            <a:ext cx="3251200" cy="243840"/>
-          </a:xfrm>
-          <a:prstGeom prst="rect">
-            <a:avLst/>
-          </a:prstGeom>
-          <a:noFill/>
-        </p:spPr>
-        <p:txBody>
-          <a:bodyPr wrap="none" lIns="0" rIns="0" tIns="0" bIns="0">
-            <a:spAutoFit/>
-          </a:bodyPr>
-          <a:lstStyle/>
-          <a:p>
-            <a:r>
-              <a:rPr b="1" sz="1100">
-                <a:solidFill>
-                  <a:srgbClr val="333333"/>
-                </a:solidFill>
-                <a:latin typeface="Yu Gothic"/>
-              </a:rPr>
-              <a:t>・公式HPがない企業にも対応</a:t>
-            </a:r>
-          </a:p>
-        </p:txBody>
-      </p:sp>
-      <p:sp>
-        <p:nvSpPr>
-          <p:cNvPr id="20" name="TextBox 19"/>
-          <p:cNvSpPr txBox="1"/>
-          <p:nvPr/>
-        </p:nvSpPr>
-        <p:spPr>
-          <a:xfrm>
-            <a:off x="325120" y="5730240"/>
-            <a:ext cx="3251200" cy="243840"/>
-          </a:xfrm>
-          <a:prstGeom prst="rect">
-            <a:avLst/>
-          </a:prstGeom>
-          <a:noFill/>
-        </p:spPr>
-        <p:txBody>
-          <a:bodyPr wrap="none" lIns="0" rIns="0" tIns="0" bIns="0">
-            <a:spAutoFit/>
-          </a:bodyPr>
-          <a:lstStyle/>
-          <a:p>
-            <a:r>
-              <a:rPr b="1" sz="1100">
-                <a:solidFill>
-                  <a:srgbClr val="333333"/>
-                </a:solidFill>
-                <a:latin typeface="Yu Gothic"/>
-              </a:rPr>
-              <a:t>・問い合わせ・相談・資料請求フォームを標準搭載</a:t>
-            </a:r>
-          </a:p>
-        </p:txBody>
-      </p:sp>
-      <p:sp>
-        <p:nvSpPr>
-          <p:cNvPr id="21" name="TextBox 20"/>
-          <p:cNvSpPr txBox="1"/>
-          <p:nvPr/>
-        </p:nvSpPr>
-        <p:spPr>
-          <a:xfrm>
-            <a:off x="325120" y="6096000"/>
-            <a:ext cx="3251200" cy="243840"/>
-          </a:xfrm>
-          <a:prstGeom prst="rect">
-            <a:avLst/>
-          </a:prstGeom>
-          <a:noFill/>
-        </p:spPr>
-        <p:txBody>
-          <a:bodyPr wrap="none" lIns="0" rIns="0" tIns="0" bIns="0">
-            <a:spAutoFit/>
-          </a:bodyPr>
-          <a:lstStyle/>
-          <a:p>
-            <a:r>
-              <a:rPr b="1" sz="1100">
-                <a:solidFill>
-                  <a:srgbClr val="333333"/>
-                </a:solidFill>
-                <a:latin typeface="Yu Gothic"/>
-              </a:rPr>
-              <a:t>・bot対策つきで安心運用</a:t>
-            </a:r>
-          </a:p>
-        </p:txBody>
-      </p:sp>
-      <p:sp>
-        <p:nvSpPr>
-          <p:cNvPr id="22" name="TextBox 21"/>
-          <p:cNvSpPr txBox="1"/>
-          <p:nvPr/>
-        </p:nvSpPr>
-        <p:spPr>
-          <a:xfrm>
-            <a:off x="325120" y="6461760"/>
-            <a:ext cx="3251200" cy="243840"/>
-          </a:xfrm>
-          <a:prstGeom prst="rect">
-            <a:avLst/>
-          </a:prstGeom>
-          <a:noFill/>
-        </p:spPr>
-        <p:txBody>
-          <a:bodyPr wrap="none" lIns="0" rIns="0" tIns="0" bIns="0">
-            <a:spAutoFit/>
-          </a:bodyPr>
-          <a:lstStyle/>
-          <a:p>
-            <a:r>
-              <a:rPr b="1" sz="1100">
-                <a:solidFill>
-                  <a:srgbClr val="333333"/>
-                </a:solidFill>
-                <a:latin typeface="Yu Gothic"/>
-              </a:rPr>
-              <a:t>・サービス内容、導入メリット、FAQを整理</a:t>
-            </a:r>
-          </a:p>
-        </p:txBody>
-      </p:sp>
-      <p:sp>
-        <p:nvSpPr>
-          <p:cNvPr id="23" name="TextBox 22"/>
-          <p:cNvSpPr txBox="1"/>
-          <p:nvPr/>
-        </p:nvSpPr>
-        <p:spPr>
-          <a:xfrm>
-            <a:off x="325120" y="6827520"/>
-            <a:ext cx="3251200" cy="243840"/>
-          </a:xfrm>
-          <a:prstGeom prst="rect">
-            <a:avLst/>
-          </a:prstGeom>
-          <a:noFill/>
-        </p:spPr>
-        <p:txBody>
-          <a:bodyPr wrap="none" lIns="0" rIns="0" tIns="0" bIns="0">
-            <a:spAutoFit/>
-          </a:bodyPr>
-          <a:lstStyle/>
-          <a:p>
-            <a:r>
-              <a:rPr b="1" sz="1100">
-                <a:solidFill>
-                  <a:srgbClr val="333333"/>
-                </a:solidFill>
-                <a:latin typeface="Yu Gothic"/>
-              </a:rPr>
-              <a:t>・SEO / AEO / GEO / LLMO に対応</a:t>
-            </a:r>
-          </a:p>
-        </p:txBody>
-      </p:sp>
-      <p:sp>
-        <p:nvSpPr>
-          <p:cNvPr id="24" name="TextBox 23"/>
-          <p:cNvSpPr txBox="1"/>
-          <p:nvPr/>
-        </p:nvSpPr>
-        <p:spPr>
-          <a:xfrm>
-            <a:off x="325120" y="7193280"/>
-            <a:ext cx="3251200" cy="243840"/>
-          </a:xfrm>
-          <a:prstGeom prst="rect">
-            <a:avLst/>
-          </a:prstGeom>
-          <a:noFill/>
-        </p:spPr>
-        <p:txBody>
-          <a:bodyPr wrap="none" lIns="0" rIns="0" tIns="0" bIns="0">
-            <a:spAutoFit/>
-          </a:bodyPr>
-          <a:lstStyle/>
-          <a:p>
-            <a:r>
-              <a:rPr b="1" sz="1100">
-                <a:solidFill>
-                  <a:srgbClr val="333333"/>
-                </a:solidFill>
-                <a:latin typeface="Yu Gothic"/>
-              </a:rPr>
-              <a:t>・AI検索に伝わる構造化データを実装</a:t>
-            </a:r>
-          </a:p>
-        </p:txBody>
-      </p:sp>
-      <p:sp>
-        <p:nvSpPr>
-          <p:cNvPr id="25" name="TextBox 24"/>
-          <p:cNvSpPr txBox="1"/>
-          <p:nvPr/>
-        </p:nvSpPr>
-        <p:spPr>
-          <a:xfrm>
-            <a:off x="325120" y="7559040"/>
-            <a:ext cx="3251200" cy="243840"/>
-          </a:xfrm>
-          <a:prstGeom prst="rect">
-            <a:avLst/>
-          </a:prstGeom>
-          <a:noFill/>
-        </p:spPr>
-        <p:txBody>
-          <a:bodyPr wrap="none" lIns="0" rIns="0" tIns="0" bIns="0">
-            <a:spAutoFit/>
-          </a:bodyPr>
-          <a:lstStyle/>
-          <a:p>
-            <a:r>
-              <a:rPr b="1" sz="1100">
-                <a:solidFill>
-                  <a:srgbClr val="333333"/>
-                </a:solidFill>
-                <a:latin typeface="Yu Gothic"/>
-              </a:rPr>
-              <a:t>・公開後のAEO更新にも対応可能</a:t>
-            </a:r>
-          </a:p>
-        </p:txBody>
-      </p:sp>
-      <p:sp>
-        <p:nvSpPr>
-          <p:cNvPr id="26" name="Oval 25"/>
-          <p:cNvSpPr/>
-          <p:nvPr/>
-        </p:nvSpPr>
-        <p:spPr>
-          <a:xfrm>
-            <a:off x="4064000" y="6339840"/>
-            <a:ext cx="1137920" cy="1219200"/>
-          </a:xfrm>
-          <a:prstGeom prst="ellipse">
-            <a:avLst/>
-          </a:prstGeom>
-          <a:solidFill>
-            <a:srgbClr val="0B305F"/>
-          </a:solidFill>
-          <a:ln w="15000">
-            <a:solidFill>
-              <a:srgbClr val="0B305F"/>
-            </a:solidFill>
-          </a:ln>
-        </p:spPr>
-        <p:style>
-          <a:lnRef idx="1">
-            <a:schemeClr val="accent1"/>
-          </a:lnRef>
-          <a:fillRef idx="3">
-            <a:schemeClr val="accent1"/>
-          </a:fillRef>
-          <a:effectRef idx="2">
-            <a:schemeClr val="accent1"/>
-          </a:effectRef>
-          <a:fontRef idx="minor">
-            <a:schemeClr val="lt1"/>
-          </a:fontRef>
-        </p:style>
-        <p:txBody>
-          <a:bodyPr rtlCol="0" anchor="ctr"/>
-          <a:lstStyle/>
-          <a:p>
-            <a:pPr algn="ctr"/>
-          </a:p>
-        </p:txBody>
-      </p:sp>
-      <p:sp>
-        <p:nvSpPr>
-          <p:cNvPr id="27" name="TextBox 26"/>
-          <p:cNvSpPr txBox="1"/>
-          <p:nvPr/>
-        </p:nvSpPr>
-        <p:spPr>
-          <a:xfrm>
-            <a:off x="4064000" y="6461760"/>
-            <a:ext cx="1137920" cy="975360"/>
-          </a:xfrm>
-          <a:prstGeom prst="rect">
-            <a:avLst/>
-          </a:prstGeom>
-          <a:noFill/>
-        </p:spPr>
-        <p:txBody>
-          <a:bodyPr wrap="none" lIns="0" rIns="0" tIns="0" bIns="0">
-            <a:spAutoFit/>
-          </a:bodyPr>
-          <a:lstStyle/>
-          <a:p>
-            <a:r>
-              <a:rPr b="1" sz="1000">
-                <a:solidFill>
-                  <a:srgbClr val="FFFFFF"/>
-                </a:solidFill>
-                <a:latin typeface="Yu Gothic"/>
-              </a:rPr>
-              <a:t>AI検索に
-選ばれやすい
-構造設計</a:t>
-            </a:r>
-          </a:p>
-        </p:txBody>
-      </p:sp>
-      <p:sp>
-        <p:nvSpPr>
-          <p:cNvPr id="28" name="Oval 27"/>
-          <p:cNvSpPr/>
-          <p:nvPr/>
-        </p:nvSpPr>
-        <p:spPr>
-          <a:xfrm>
-            <a:off x="5283200" y="6339840"/>
-            <a:ext cx="1137920" cy="1219200"/>
-          </a:xfrm>
-          <a:prstGeom prst="ellipse">
-            <a:avLst/>
-          </a:prstGeom>
-          <a:solidFill>
-            <a:srgbClr val="0B305F"/>
-          </a:solidFill>
-          <a:ln w="15000">
-            <a:solidFill>
-              <a:srgbClr val="0B305F"/>
-            </a:solidFill>
-          </a:ln>
-        </p:spPr>
-        <p:style>
-          <a:lnRef idx="1">
-            <a:schemeClr val="accent1"/>
-          </a:lnRef>
-          <a:fillRef idx="3">
-            <a:schemeClr val="accent1"/>
-          </a:fillRef>
-          <a:effectRef idx="2">
-            <a:schemeClr val="accent1"/>
-          </a:effectRef>
-          <a:fontRef idx="minor">
-            <a:schemeClr val="lt1"/>
-          </a:fontRef>
-        </p:style>
-        <p:txBody>
-          <a:bodyPr rtlCol="0" anchor="ctr"/>
-          <a:lstStyle/>
-          <a:p>
-            <a:pPr algn="ctr"/>
-          </a:p>
-        </p:txBody>
-      </p:sp>
-      <p:sp>
-        <p:nvSpPr>
-          <p:cNvPr id="29" name="TextBox 28"/>
-          <p:cNvSpPr txBox="1"/>
-          <p:nvPr/>
-        </p:nvSpPr>
-        <p:spPr>
-          <a:xfrm>
-            <a:off x="5283200" y="6461760"/>
-            <a:ext cx="1137920" cy="975360"/>
-          </a:xfrm>
-          <a:prstGeom prst="rect">
-            <a:avLst/>
-          </a:prstGeom>
-          <a:noFill/>
-        </p:spPr>
-        <p:txBody>
-          <a:bodyPr wrap="none" lIns="0" rIns="0" tIns="0" bIns="0">
-            <a:spAutoFit/>
-          </a:bodyPr>
-          <a:lstStyle/>
-          <a:p>
-            <a:r>
-              <a:rPr b="1" sz="1000">
-                <a:solidFill>
-                  <a:srgbClr val="FFFFFF"/>
-                </a:solidFill>
-                <a:latin typeface="Yu Gothic"/>
-              </a:rPr>
-              <a:t>問い合わせに
-つながる
-導線設計</a:t>
-            </a:r>
-          </a:p>
-        </p:txBody>
-      </p:sp>
-      <p:sp>
-        <p:nvSpPr>
-          <p:cNvPr id="30" name="Oval 29"/>
-          <p:cNvSpPr/>
-          <p:nvPr/>
-        </p:nvSpPr>
-        <p:spPr>
-          <a:xfrm>
-            <a:off x="6502400" y="6339840"/>
-            <a:ext cx="1137920" cy="1219200"/>
-          </a:xfrm>
-          <a:prstGeom prst="ellipse">
-            <a:avLst/>
-          </a:prstGeom>
-          <a:solidFill>
-            <a:srgbClr val="0B305F"/>
-          </a:solidFill>
-          <a:ln w="15000">
-            <a:solidFill>
-              <a:srgbClr val="0B305F"/>
-            </a:solidFill>
-          </a:ln>
-        </p:spPr>
-        <p:style>
-          <a:lnRef idx="1">
-            <a:schemeClr val="accent1"/>
-          </a:lnRef>
-          <a:fillRef idx="3">
-            <a:schemeClr val="accent1"/>
-          </a:fillRef>
-          <a:effectRef idx="2">
-            <a:schemeClr val="accent1"/>
-          </a:effectRef>
-          <a:fontRef idx="minor">
-            <a:schemeClr val="lt1"/>
-          </a:fontRef>
-        </p:style>
-        <p:txBody>
-          <a:bodyPr rtlCol="0" anchor="ctr"/>
-          <a:lstStyle/>
-          <a:p>
-            <a:pPr algn="ctr"/>
-          </a:p>
-        </p:txBody>
-      </p:sp>
-      <p:sp>
-        <p:nvSpPr>
-          <p:cNvPr id="31" name="TextBox 30"/>
-          <p:cNvSpPr txBox="1"/>
-          <p:nvPr/>
-        </p:nvSpPr>
-        <p:spPr>
-          <a:xfrm>
-            <a:off x="6502400" y="6461760"/>
-            <a:ext cx="1137920" cy="975360"/>
-          </a:xfrm>
-          <a:prstGeom prst="rect">
-            <a:avLst/>
-          </a:prstGeom>
-          <a:noFill/>
-        </p:spPr>
-        <p:txBody>
-          <a:bodyPr wrap="none" lIns="0" rIns="0" tIns="0" bIns="0">
-            <a:spAutoFit/>
-          </a:bodyPr>
-          <a:lstStyle/>
-          <a:p>
-            <a:r>
-              <a:rPr b="1" sz="1000">
-                <a:solidFill>
-                  <a:srgbClr val="FFFFFF"/>
-                </a:solidFill>
-                <a:latin typeface="Yu Gothic"/>
-              </a:rPr>
-              <a:t>商談獲得を
-最大化する
-LP設計</a:t>
-            </a:r>
-          </a:p>
-        </p:txBody>
-      </p:sp>
-      <p:sp>
-        <p:nvSpPr>
-          <p:cNvPr id="32" name="TextBox 31"/>
-          <p:cNvSpPr txBox="1"/>
-          <p:nvPr/>
-        </p:nvSpPr>
-        <p:spPr>
-          <a:xfrm>
-            <a:off x="2438400" y="7680960"/>
-            <a:ext cx="3251200" cy="365760"/>
-          </a:xfrm>
-          <a:prstGeom prst="rect">
-            <a:avLst/>
-          </a:prstGeom>
-          <a:noFill/>
-        </p:spPr>
-        <p:txBody>
-          <a:bodyPr wrap="none" lIns="0" rIns="0" tIns="0" bIns="0">
-            <a:spAutoFit/>
-          </a:bodyPr>
-          <a:lstStyle/>
-          <a:p>
-            <a:r>
-              <a:rPr b="1" sz="1400">
-                <a:solidFill>
-                  <a:srgbClr val="0B305F"/>
-                </a:solidFill>
-                <a:latin typeface="Yu Gothic"/>
-              </a:rPr>
-              <a:t>普通のホームページ制作との違い</a:t>
-            </a:r>
-          </a:p>
-        </p:txBody>
-      </p:sp>
-      <p:sp>
-        <p:nvSpPr>
-          <p:cNvPr id="33" name="Rounded Rectangle 32"/>
-          <p:cNvSpPr/>
-          <p:nvPr/>
-        </p:nvSpPr>
-        <p:spPr>
-          <a:xfrm>
-            <a:off x="162560" y="7924800"/>
-            <a:ext cx="3495040" cy="365760"/>
-          </a:xfrm>
-          <a:prstGeom prst="roundRect">
-            <a:avLst/>
-          </a:prstGeom>
-          <a:solidFill>
-            <a:srgbClr val="555555"/>
-          </a:solidFill>
-          <a:ln w="15000">
-            <a:solidFill>
-              <a:srgbClr val="0B305F"/>
-            </a:solidFill>
-          </a:ln>
-        </p:spPr>
-        <p:style>
-          <a:lnRef idx="1">
-            <a:schemeClr val="accent1"/>
-          </a:lnRef>
-          <a:fillRef idx="3">
-            <a:schemeClr val="accent1"/>
-          </a:fillRef>
-          <a:effectRef idx="2">
-            <a:schemeClr val="accent1"/>
-          </a:effectRef>
-          <a:fontRef idx="minor">
-            <a:schemeClr val="lt1"/>
-          </a:fontRef>
-        </p:style>
-        <p:txBody>
-          <a:bodyPr rtlCol="0" anchor="ctr"/>
-          <a:lstStyle/>
-          <a:p>
-            <a:pPr algn="ctr"/>
-          </a:p>
-        </p:txBody>
-      </p:sp>
-      <p:sp>
-        <p:nvSpPr>
-          <p:cNvPr id="34" name="TextBox 33"/>
-          <p:cNvSpPr txBox="1"/>
-          <p:nvPr/>
-        </p:nvSpPr>
-        <p:spPr>
-          <a:xfrm>
-            <a:off x="162560" y="7924800"/>
-            <a:ext cx="3495040" cy="365760"/>
-          </a:xfrm>
-          <a:prstGeom prst="rect">
-            <a:avLst/>
-          </a:prstGeom>
-          <a:noFill/>
-        </p:spPr>
-        <p:txBody>
-          <a:bodyPr wrap="none" lIns="0" rIns="0" tIns="0" bIns="0">
-            <a:spAutoFit/>
-          </a:bodyPr>
-          <a:lstStyle/>
-          <a:p>
-            <a:r>
-              <a:rPr b="1" sz="1100">
-                <a:solidFill>
-                  <a:srgbClr val="FFFFFF"/>
-                </a:solidFill>
-                <a:latin typeface="Yu Gothic"/>
-              </a:rPr>
-              <a:t>一般的な制作・テンプレート</a:t>
-            </a:r>
-          </a:p>
-        </p:txBody>
-      </p:sp>
-      <p:sp>
-        <p:nvSpPr>
-          <p:cNvPr id="35" name="TextBox 34"/>
-          <p:cNvSpPr txBox="1"/>
-          <p:nvPr/>
-        </p:nvSpPr>
-        <p:spPr>
-          <a:xfrm>
-            <a:off x="1869440" y="8412480"/>
-            <a:ext cx="1625600" cy="243840"/>
-          </a:xfrm>
-          <a:prstGeom prst="rect">
-            <a:avLst/>
-          </a:prstGeom>
-          <a:noFill/>
-        </p:spPr>
-        <p:txBody>
-          <a:bodyPr wrap="none" lIns="0" rIns="0" tIns="0" bIns="0">
-            <a:spAutoFit/>
-          </a:bodyPr>
-          <a:lstStyle/>
-          <a:p>
-            <a:r>
-              <a:rPr b="0" sz="1000">
-                <a:solidFill>
-                  <a:srgbClr val="555555"/>
-                </a:solidFill>
-                <a:latin typeface="Yu Gothic"/>
-              </a:rPr>
-              <a:t>× 会社紹介で終わりやすい</a:t>
-            </a:r>
-          </a:p>
-        </p:txBody>
-      </p:sp>
-      <p:sp>
-        <p:nvSpPr>
-          <p:cNvPr id="36" name="TextBox 35"/>
-          <p:cNvSpPr txBox="1"/>
-          <p:nvPr/>
-        </p:nvSpPr>
-        <p:spPr>
-          <a:xfrm>
-            <a:off x="1869440" y="8656320"/>
-            <a:ext cx="1625600" cy="243840"/>
-          </a:xfrm>
-          <a:prstGeom prst="rect">
-            <a:avLst/>
-          </a:prstGeom>
-          <a:noFill/>
-        </p:spPr>
-        <p:txBody>
-          <a:bodyPr wrap="none" lIns="0" rIns="0" tIns="0" bIns="0">
-            <a:spAutoFit/>
-          </a:bodyPr>
-          <a:lstStyle/>
-          <a:p>
-            <a:r>
-              <a:rPr b="0" sz="1000">
-                <a:solidFill>
-                  <a:srgbClr val="555555"/>
-                </a:solidFill>
-                <a:latin typeface="Yu Gothic"/>
-              </a:rPr>
-              <a:t>× 問い合わせ導線が弱い</a:t>
-            </a:r>
-          </a:p>
-        </p:txBody>
-      </p:sp>
-      <p:sp>
-        <p:nvSpPr>
-          <p:cNvPr id="37" name="TextBox 36"/>
-          <p:cNvSpPr txBox="1"/>
-          <p:nvPr/>
-        </p:nvSpPr>
-        <p:spPr>
-          <a:xfrm>
-            <a:off x="1869440" y="8900160"/>
-            <a:ext cx="1625600" cy="243840"/>
-          </a:xfrm>
-          <a:prstGeom prst="rect">
-            <a:avLst/>
-          </a:prstGeom>
-          <a:noFill/>
-        </p:spPr>
-        <p:txBody>
-          <a:bodyPr wrap="none" lIns="0" rIns="0" tIns="0" bIns="0">
-            <a:spAutoFit/>
-          </a:bodyPr>
-          <a:lstStyle/>
-          <a:p>
-            <a:r>
-              <a:rPr b="0" sz="1000">
-                <a:solidFill>
-                  <a:srgbClr val="555555"/>
-                </a:solidFill>
-                <a:latin typeface="Yu Gothic"/>
-              </a:rPr>
-              <a:t>× AI検索に伝わる構造が不足</a:t>
-            </a:r>
-          </a:p>
-        </p:txBody>
-      </p:sp>
-      <p:sp>
-        <p:nvSpPr>
-          <p:cNvPr id="38" name="TextBox 37"/>
-          <p:cNvSpPr txBox="1"/>
-          <p:nvPr/>
-        </p:nvSpPr>
-        <p:spPr>
-          <a:xfrm>
-            <a:off x="1869440" y="9144000"/>
-            <a:ext cx="1625600" cy="243840"/>
-          </a:xfrm>
-          <a:prstGeom prst="rect">
-            <a:avLst/>
-          </a:prstGeom>
-          <a:noFill/>
-        </p:spPr>
-        <p:txBody>
-          <a:bodyPr wrap="none" lIns="0" rIns="0" tIns="0" bIns="0">
-            <a:spAutoFit/>
-          </a:bodyPr>
-          <a:lstStyle/>
-          <a:p>
-            <a:r>
-              <a:rPr b="0" sz="1000">
-                <a:solidFill>
-                  <a:srgbClr val="555555"/>
-                </a:solidFill>
-                <a:latin typeface="Yu Gothic"/>
-              </a:rPr>
-              <a:t>× 強みが整理されにくい</a:t>
-            </a:r>
-          </a:p>
-        </p:txBody>
-      </p:sp>
-      <p:sp>
-        <p:nvSpPr>
-          <p:cNvPr id="39" name="Rounded Rectangle 38"/>
-          <p:cNvSpPr/>
-          <p:nvPr/>
-        </p:nvSpPr>
-        <p:spPr>
-          <a:xfrm>
-            <a:off x="3901440" y="7924800"/>
-            <a:ext cx="3901440" cy="365760"/>
-          </a:xfrm>
-          <a:prstGeom prst="roundRect">
-            <a:avLst/>
-          </a:prstGeom>
-          <a:solidFill>
-            <a:srgbClr val="0B305F"/>
-          </a:solidFill>
-          <a:ln w="15000">
-            <a:solidFill>
-              <a:srgbClr val="0B305F"/>
-            </a:solidFill>
-          </a:ln>
-        </p:spPr>
-        <p:style>
-          <a:lnRef idx="1">
-            <a:schemeClr val="accent1"/>
-          </a:lnRef>
-          <a:fillRef idx="3">
-            <a:schemeClr val="accent1"/>
-          </a:fillRef>
-          <a:effectRef idx="2">
-            <a:schemeClr val="accent1"/>
-          </a:effectRef>
-          <a:fontRef idx="minor">
-            <a:schemeClr val="lt1"/>
-          </a:fontRef>
-        </p:style>
-        <p:txBody>
-          <a:bodyPr rtlCol="0" anchor="ctr"/>
-          <a:lstStyle/>
-          <a:p>
-            <a:pPr algn="ctr"/>
-          </a:p>
-        </p:txBody>
-      </p:sp>
-      <p:sp>
-        <p:nvSpPr>
-          <p:cNvPr id="40" name="TextBox 39"/>
-          <p:cNvSpPr txBox="1"/>
-          <p:nvPr/>
-        </p:nvSpPr>
-        <p:spPr>
-          <a:xfrm>
-            <a:off x="3901440" y="7924800"/>
-            <a:ext cx="3901440" cy="365760"/>
-          </a:xfrm>
-          <a:prstGeom prst="rect">
-            <a:avLst/>
-          </a:prstGeom>
-          <a:noFill/>
-        </p:spPr>
-        <p:txBody>
-          <a:bodyPr wrap="none" lIns="0" rIns="0" tIns="0" bIns="0">
-            <a:spAutoFit/>
-          </a:bodyPr>
-          <a:lstStyle/>
-          <a:p>
-            <a:r>
-              <a:rPr b="1" sz="1100">
-                <a:solidFill>
-                  <a:srgbClr val="FFFFFF"/>
-                </a:solidFill>
-                <a:latin typeface="Yu Gothic"/>
-              </a:rPr>
-              <a:t>AEO＋LP</a:t>
-            </a:r>
-          </a:p>
-        </p:txBody>
-      </p:sp>
-      <p:sp>
-        <p:nvSpPr>
-          <p:cNvPr id="41" name="TextBox 40"/>
-          <p:cNvSpPr txBox="1"/>
-          <p:nvPr/>
-        </p:nvSpPr>
-        <p:spPr>
-          <a:xfrm>
-            <a:off x="4064000" y="8412480"/>
-            <a:ext cx="2032000" cy="243840"/>
-          </a:xfrm>
-          <a:prstGeom prst="rect">
-            <a:avLst/>
-          </a:prstGeom>
-          <a:noFill/>
-        </p:spPr>
-        <p:txBody>
-          <a:bodyPr wrap="none" lIns="0" rIns="0" tIns="0" bIns="0">
-            <a:spAutoFit/>
-          </a:bodyPr>
-          <a:lstStyle/>
-          <a:p>
-            <a:r>
-              <a:rPr b="1" sz="1000">
-                <a:solidFill>
-                  <a:srgbClr val="0B305F"/>
-                </a:solidFill>
-                <a:latin typeface="Yu Gothic"/>
-              </a:rPr>
-              <a:t>✓ AIが事業ごとにデザイン提案</a:t>
-            </a:r>
-          </a:p>
-        </p:txBody>
-      </p:sp>
-      <p:sp>
-        <p:nvSpPr>
-          <p:cNvPr id="42" name="TextBox 41"/>
-          <p:cNvSpPr txBox="1"/>
-          <p:nvPr/>
-        </p:nvSpPr>
-        <p:spPr>
-          <a:xfrm>
-            <a:off x="4064000" y="8656320"/>
-            <a:ext cx="2032000" cy="243840"/>
-          </a:xfrm>
-          <a:prstGeom prst="rect">
-            <a:avLst/>
-          </a:prstGeom>
-          <a:noFill/>
-        </p:spPr>
-        <p:txBody>
-          <a:bodyPr wrap="none" lIns="0" rIns="0" tIns="0" bIns="0">
-            <a:spAutoFit/>
-          </a:bodyPr>
-          <a:lstStyle/>
-          <a:p>
-            <a:r>
-              <a:rPr b="1" sz="1000">
-                <a:solidFill>
-                  <a:srgbClr val="0B305F"/>
-                </a:solidFill>
-                <a:latin typeface="Yu Gothic"/>
-              </a:rPr>
-              <a:t>✓ 問い合わせと相談をLP内で受付</a:t>
-            </a:r>
-          </a:p>
-        </p:txBody>
-      </p:sp>
-      <p:sp>
-        <p:nvSpPr>
-          <p:cNvPr id="43" name="TextBox 42"/>
-          <p:cNvSpPr txBox="1"/>
-          <p:nvPr/>
-        </p:nvSpPr>
-        <p:spPr>
-          <a:xfrm>
-            <a:off x="4064000" y="8900160"/>
-            <a:ext cx="2032000" cy="243840"/>
-          </a:xfrm>
-          <a:prstGeom prst="rect">
-            <a:avLst/>
-          </a:prstGeom>
-          <a:noFill/>
-        </p:spPr>
-        <p:txBody>
-          <a:bodyPr wrap="none" lIns="0" rIns="0" tIns="0" bIns="0">
-            <a:spAutoFit/>
-          </a:bodyPr>
-          <a:lstStyle/>
-          <a:p>
-            <a:r>
-              <a:rPr b="1" sz="1000">
-                <a:solidFill>
-                  <a:srgbClr val="0B305F"/>
-                </a:solidFill>
-                <a:latin typeface="Yu Gothic"/>
-              </a:rPr>
-              <a:t>✓ FAQと構造化データでAI検索に対応</a:t>
-            </a:r>
-          </a:p>
-        </p:txBody>
-      </p:sp>
-      <p:sp>
-        <p:nvSpPr>
-          <p:cNvPr id="44" name="TextBox 43"/>
-          <p:cNvSpPr txBox="1"/>
-          <p:nvPr/>
-        </p:nvSpPr>
-        <p:spPr>
-          <a:xfrm>
-            <a:off x="4064000" y="9144000"/>
-            <a:ext cx="2032000" cy="243840"/>
-          </a:xfrm>
-          <a:prstGeom prst="rect">
-            <a:avLst/>
-          </a:prstGeom>
-          <a:noFill/>
-        </p:spPr>
-        <p:txBody>
-          <a:bodyPr wrap="none" lIns="0" rIns="0" tIns="0" bIns="0">
-            <a:spAutoFit/>
-          </a:bodyPr>
-          <a:lstStyle/>
-          <a:p>
-            <a:r>
-              <a:rPr b="1" sz="1000">
-                <a:solidFill>
-                  <a:srgbClr val="0B305F"/>
-                </a:solidFill>
-                <a:latin typeface="Yu Gothic"/>
-              </a:rPr>
-              <a:t>✓ 強み、サービス、顧客課題を営業導線に変換</a:t>
-            </a:r>
-          </a:p>
-        </p:txBody>
-      </p:sp>
-      <p:sp>
-        <p:nvSpPr>
-          <p:cNvPr id="45" name="Rectangle 44"/>
-          <p:cNvSpPr/>
-          <p:nvPr/>
-        </p:nvSpPr>
-        <p:spPr>
-          <a:xfrm>
-            <a:off x="162560" y="9875520"/>
-            <a:ext cx="7802880" cy="609600"/>
-          </a:xfrm>
-          <a:prstGeom prst="rect">
-            <a:avLst/>
-          </a:prstGeom>
-          <a:solidFill>
-            <a:srgbClr val="0B305F"/>
-          </a:solidFill>
-          <a:ln w="15000">
-            <a:solidFill>
-              <a:srgbClr val="0B305F"/>
-            </a:solidFill>
-          </a:ln>
-        </p:spPr>
-        <p:style>
-          <a:lnRef idx="1">
-            <a:schemeClr val="accent1"/>
-          </a:lnRef>
-          <a:fillRef idx="3">
-            <a:schemeClr val="accent1"/>
-          </a:fillRef>
-          <a:effectRef idx="2">
-            <a:schemeClr val="accent1"/>
-          </a:effectRef>
-          <a:fontRef idx="minor">
-            <a:schemeClr val="lt1"/>
-          </a:fontRef>
-        </p:style>
-        <p:txBody>
-          <a:bodyPr rtlCol="0" anchor="ctr"/>
-          <a:lstStyle/>
-          <a:p>
-            <a:pPr algn="ctr"/>
-          </a:p>
-        </p:txBody>
-      </p:sp>
-      <p:sp>
-        <p:nvSpPr>
-          <p:cNvPr id="46" name="TextBox 45"/>
-          <p:cNvSpPr txBox="1"/>
-          <p:nvPr/>
-        </p:nvSpPr>
-        <p:spPr>
-          <a:xfrm>
-            <a:off x="812800" y="9997440"/>
-            <a:ext cx="1219200" cy="365760"/>
-          </a:xfrm>
-          <a:prstGeom prst="rect">
-            <a:avLst/>
-          </a:prstGeom>
-          <a:noFill/>
-        </p:spPr>
-        <p:txBody>
-          <a:bodyPr wrap="none" lIns="0" rIns="0" tIns="0" bIns="0">
-            <a:spAutoFit/>
-          </a:bodyPr>
-          <a:lstStyle/>
-          <a:p>
-            <a:r>
-              <a:rPr b="1" sz="900">
-                <a:solidFill>
-                  <a:srgbClr val="FFFFFF"/>
-                </a:solidFill>
-                <a:latin typeface="Yu Gothic"/>
-              </a:rPr>
-              <a:t>BtoBに最適化した
-LP設計</a:t>
-            </a:r>
-          </a:p>
-        </p:txBody>
-      </p:sp>
-      <p:sp>
-        <p:nvSpPr>
-          <p:cNvPr id="47" name="TextBox 46"/>
-          <p:cNvSpPr txBox="1"/>
-          <p:nvPr/>
-        </p:nvSpPr>
-        <p:spPr>
-          <a:xfrm>
-            <a:off x="2763520" y="9997440"/>
-            <a:ext cx="1219200" cy="365760"/>
-          </a:xfrm>
-          <a:prstGeom prst="rect">
-            <a:avLst/>
-          </a:prstGeom>
-          <a:noFill/>
-        </p:spPr>
-        <p:txBody>
-          <a:bodyPr wrap="none" lIns="0" rIns="0" tIns="0" bIns="0">
-            <a:spAutoFit/>
-          </a:bodyPr>
-          <a:lstStyle/>
-          <a:p>
-            <a:r>
-              <a:rPr b="1" sz="900">
-                <a:solidFill>
-                  <a:srgbClr val="FFFFFF"/>
-                </a:solidFill>
-                <a:latin typeface="Yu Gothic"/>
-              </a:rPr>
-              <a:t>AI検索を意識した
-情報設計</a:t>
-            </a:r>
-          </a:p>
-        </p:txBody>
-      </p:sp>
-      <p:sp>
-        <p:nvSpPr>
-          <p:cNvPr id="48" name="TextBox 47"/>
-          <p:cNvSpPr txBox="1"/>
-          <p:nvPr/>
-        </p:nvSpPr>
-        <p:spPr>
-          <a:xfrm>
-            <a:off x="4714240" y="9997440"/>
-            <a:ext cx="1219200" cy="365760"/>
-          </a:xfrm>
-          <a:prstGeom prst="rect">
-            <a:avLst/>
-          </a:prstGeom>
-          <a:noFill/>
-        </p:spPr>
-        <p:txBody>
-          <a:bodyPr wrap="none" lIns="0" rIns="0" tIns="0" bIns="0">
-            <a:spAutoFit/>
-          </a:bodyPr>
-          <a:lstStyle/>
-          <a:p>
-            <a:r>
-              <a:rPr b="1" sz="900">
-                <a:solidFill>
-                  <a:srgbClr val="FFFFFF"/>
-                </a:solidFill>
-                <a:latin typeface="Yu Gothic"/>
-              </a:rPr>
-              <a:t>データに基づく
-改善提案</a:t>
-            </a:r>
-          </a:p>
-        </p:txBody>
-      </p:sp>
-      <p:sp>
-        <p:nvSpPr>
-          <p:cNvPr id="49" name="TextBox 48"/>
-          <p:cNvSpPr txBox="1"/>
-          <p:nvPr/>
-        </p:nvSpPr>
-        <p:spPr>
-          <a:xfrm>
-            <a:off x="6502400" y="9997440"/>
-            <a:ext cx="1463040" cy="365760"/>
-          </a:xfrm>
-          <a:prstGeom prst="rect">
-            <a:avLst/>
-          </a:prstGeom>
-          <a:noFill/>
-        </p:spPr>
-        <p:txBody>
-          <a:bodyPr wrap="none" lIns="0" rIns="0" tIns="0" bIns="0">
-            <a:spAutoFit/>
-          </a:bodyPr>
-          <a:lstStyle/>
-          <a:p>
-            <a:r>
-              <a:rPr b="1" sz="900">
-                <a:solidFill>
-                  <a:srgbClr val="FFFFFF"/>
-                </a:solidFill>
-                <a:latin typeface="Yu Gothic"/>
-              </a:rPr>
-              <a:t>公開後の運用・改善まで
-継続サポート</a:t>
-            </a:r>
-          </a:p>
-        </p:txBody>
-      </p:sp>
-      <p:sp>
-        <p:nvSpPr>
-          <p:cNvPr id="50" name="TextBox 49"/>
-          <p:cNvSpPr txBox="1"/>
-          <p:nvPr/>
-        </p:nvSpPr>
-        <p:spPr>
-          <a:xfrm>
-            <a:off x="406400" y="10607040"/>
-            <a:ext cx="3657600" cy="731520"/>
-          </a:xfrm>
-          <a:prstGeom prst="rect">
-            <a:avLst/>
-          </a:prstGeom>
-          <a:noFill/>
-        </p:spPr>
-        <p:txBody>
-          <a:bodyPr wrap="none" lIns="0" rIns="0" tIns="0" bIns="0">
-            <a:spAutoFit/>
-          </a:bodyPr>
-          <a:lstStyle/>
-          <a:p>
-            <a:r>
-              <a:rPr b="1" sz="1800">
-                <a:solidFill>
-                  <a:srgbClr val="0B305F"/>
-                </a:solidFill>
-                <a:latin typeface="Yu Gothic"/>
-              </a:rPr>
-              <a:t>まずは事業内容から、
-専用LPをご提案します。</a:t>
-            </a:r>
-          </a:p>
-        </p:txBody>
-      </p:sp>
-      <p:sp>
-        <p:nvSpPr>
-          <p:cNvPr id="51" name="Rounded Rectangle 50"/>
-          <p:cNvSpPr/>
-          <p:nvPr/>
-        </p:nvSpPr>
-        <p:spPr>
-          <a:xfrm>
-            <a:off x="4307840" y="10607040"/>
-            <a:ext cx="3413760" cy="609600"/>
-          </a:xfrm>
-          <a:prstGeom prst="roundRect">
-            <a:avLst/>
-          </a:prstGeom>
-          <a:solidFill>
-            <a:srgbClr val="B89030"/>
-          </a:solidFill>
-          <a:ln w="15000">
-            <a:solidFill>
-              <a:srgbClr val="0B305F"/>
-            </a:solidFill>
-          </a:ln>
-        </p:spPr>
-        <p:style>
-          <a:lnRef idx="1">
-            <a:schemeClr val="accent1"/>
-          </a:lnRef>
-          <a:fillRef idx="3">
-            <a:schemeClr val="accent1"/>
-          </a:fillRef>
-          <a:effectRef idx="2">
-            <a:schemeClr val="accent1"/>
-          </a:effectRef>
-          <a:fontRef idx="minor">
-            <a:schemeClr val="lt1"/>
-          </a:fontRef>
-        </p:style>
-        <p:txBody>
-          <a:bodyPr rtlCol="0" anchor="ctr"/>
-          <a:lstStyle/>
-          <a:p>
-            <a:pPr algn="ctr"/>
-          </a:p>
-        </p:txBody>
-      </p:sp>
-      <p:sp>
-        <p:nvSpPr>
-          <p:cNvPr id="52" name="TextBox 51"/>
-          <p:cNvSpPr txBox="1"/>
-          <p:nvPr/>
-        </p:nvSpPr>
-        <p:spPr>
-          <a:xfrm>
-            <a:off x="4307840" y="10728960"/>
-            <a:ext cx="3413760" cy="365760"/>
-          </a:xfrm>
-          <a:prstGeom prst="rect">
-            <a:avLst/>
-          </a:prstGeom>
-          <a:noFill/>
-        </p:spPr>
-        <p:txBody>
-          <a:bodyPr wrap="none" lIns="0" rIns="0" tIns="0" bIns="0">
-            <a:spAutoFit/>
-          </a:bodyPr>
-          <a:lstStyle/>
-          <a:p>
-            <a:r>
-              <a:rPr b="1" sz="1400">
-                <a:solidFill>
-                  <a:srgbClr val="FFFFFF"/>
-                </a:solidFill>
-                <a:latin typeface="Yu Gothic"/>
-              </a:rPr>
-              <a:t>お問い合わせ・ご相談はこちら</a:t>
-            </a:r>
-          </a:p>
-        </p:txBody>
-      </p:sp>
-      <p:sp>
-        <p:nvSpPr>
-          <p:cNvPr id="53" name="TextBox 52"/>
-          <p:cNvSpPr txBox="1"/>
-          <p:nvPr/>
-        </p:nvSpPr>
-        <p:spPr>
-          <a:xfrm>
-            <a:off x="4307840" y="11216640"/>
-            <a:ext cx="3413760" cy="243840"/>
-          </a:xfrm>
-          <a:prstGeom prst="rect">
-            <a:avLst/>
-          </a:prstGeom>
-          <a:noFill/>
-        </p:spPr>
-        <p:txBody>
-          <a:bodyPr wrap="none" lIns="0" rIns="0" tIns="0" bIns="0">
-            <a:spAutoFit/>
-          </a:bodyPr>
-          <a:lstStyle/>
-          <a:p>
-            <a:r>
-              <a:rPr b="0" sz="900">
-                <a:solidFill>
-                  <a:srgbClr val="FFFFFF"/>
-                </a:solidFill>
-                <a:latin typeface="Yu Gothic"/>
-              </a:rPr>
-              <a:t>ご相談・お見積りは無料です</a:t>
-            </a:r>
-          </a:p>
-        </p:txBody>
-      </p:sp>
-      <p:pic>
-        <p:nvPicPr>
-          <p:cNvPr id="54" name="Picture 53" descr="region-0.png"/>
-          <p:cNvPicPr>
-            <a:picLocks noChangeAspect="1"/>
-          </p:cNvPicPr>
-          <p:nvPr/>
-        </p:nvPicPr>
-        <p:blipFill>
-          <a:blip r:embed="rId4"/>
-          <a:stretch>
-            <a:fillRect/>
-          </a:stretch>
-        </p:blipFill>
-        <p:spPr>
-          <a:xfrm>
-            <a:off x="3738880" y="243840"/>
-            <a:ext cx="4226560" cy="4267200"/>
-          </a:xfrm>
-          <a:prstGeom prst="rect">
-            <a:avLst/>
-          </a:prstGeom>
-        </p:spPr>
-      </p:pic>
-      <p:pic>
-        <p:nvPicPr>
-          <p:cNvPr id="55" name="Picture 54" descr="region-2.png"/>
-          <p:cNvPicPr>
-            <a:picLocks noChangeAspect="1"/>
-          </p:cNvPicPr>
-          <p:nvPr/>
-        </p:nvPicPr>
-        <p:blipFill>
-          <a:blip r:embed="rId5"/>
-          <a:stretch>
-            <a:fillRect/>
-          </a:stretch>
-        </p:blipFill>
-        <p:spPr>
-          <a:xfrm>
-            <a:off x="243840" y="8412480"/>
-            <a:ext cx="1463040" cy="1341120"/>
-          </a:xfrm>
-          <a:prstGeom prst="rect">
-            <a:avLst/>
-          </a:prstGeom>
-        </p:spPr>
-      </p:pic>
-      <p:pic>
-        <p:nvPicPr>
-          <p:cNvPr id="56" name="Picture 55" descr="region-3.png"/>
-          <p:cNvPicPr>
-            <a:picLocks noChangeAspect="1"/>
-          </p:cNvPicPr>
-          <p:nvPr/>
-        </p:nvPicPr>
-        <p:blipFill>
-          <a:blip r:embed="rId6"/>
-          <a:stretch>
-            <a:fillRect/>
-          </a:stretch>
-        </p:blipFill>
-        <p:spPr>
-          <a:xfrm>
-            <a:off x="6177280" y="8412480"/>
-            <a:ext cx="1544320" cy="1341120"/>
+            <a:off x="3657600" y="3535679"/>
+            <a:ext cx="4226560" cy="4632960"/>
           </a:xfrm>
           <a:prstGeom prst="rect">
             <a:avLst/>
